--- a/SegundoAnyo/SegundoCuatri/Calidad/CMMI_Appraisals_Maturity.pptx
+++ b/SegundoAnyo/SegundoCuatri/Calidad/CMMI_Appraisals_Maturity.pptx
@@ -4,6 +4,9 @@
   <p:sldMasterIdLst>
     <p:sldMasterId id="2147483648" r:id="rId1"/>
   </p:sldMasterIdLst>
+  <p:notesMasterIdLst>
+    <p:notesMasterId r:id="rId13"/>
+  </p:notesMasterIdLst>
   <p:sldIdLst>
     <p:sldId id="256" r:id="rId2"/>
     <p:sldId id="257" r:id="rId3"/>
@@ -17,10 +20,7 @@
     <p:sldId id="265" r:id="rId11"/>
     <p:sldId id="266" r:id="rId12"/>
   </p:sldIdLst>
-  <p:notesMasterIdLst>
-    <p:notesMasterId r:id="rId13"/>
-  </p:notesMasterIdLst>
-  <p:sldSz cx="9144000" cy="5143500"/>
+  <p:sldSz cx="9144000" cy="5143500" type="screen16x9"/>
   <p:notesSz cx="5143500" cy="9144000"/>
   <p:defaultTextStyle>
     <a:lvl1pPr marL="0" algn="l" defTabSz="914400" rtl="0" eaLnBrk="1" latinLnBrk="0" hangingPunct="1">
@@ -114,13 +114,20 @@
       </a:defRPr>
     </a:lvl9pPr>
   </p:defaultTextStyle>
+  <p:extLst>
+    <p:ext uri="{EFAFB233-063F-42B5-8137-9DF3F51BA10A}">
+      <p15:sldGuideLst xmlns:p15="http://schemas.microsoft.com/office/powerpoint/2012/main"/>
+    </p:ext>
+  </p:extLst>
 </p:presentation>
 </file>
 
 <file path=ppt/charts/chart1.xml><?xml version="1.0" encoding="utf-8"?>
-<c:chartSpace xmlns:c="http://schemas.openxmlformats.org/drawingml/2006/chart" xmlns:a="http://schemas.openxmlformats.org/drawingml/2006/main" xmlns:r="http://schemas.openxmlformats.org/officeDocument/2006/relationships">
+<c:chartSpace xmlns:c="http://schemas.openxmlformats.org/drawingml/2006/chart" xmlns:a="http://schemas.openxmlformats.org/drawingml/2006/main" xmlns:r="http://schemas.openxmlformats.org/officeDocument/2006/relationships" xmlns:c16r2="http://schemas.microsoft.com/office/drawing/2015/06/chart">
   <c:date1904 val="0"/>
+  <c:lang val="es-ES"/>
   <c:roundedCorners val="1"/>
+  <c:style val="2"/>
   <c:chart>
     <c:autoTitleDeleted val="1"/>
     <c:plotArea>
@@ -163,6 +170,11 @@
               </a:solidFill>
               <a:effectLst/>
             </c:spPr>
+            <c:extLst>
+              <c:ext xmlns:c16="http://schemas.microsoft.com/office/drawing/2014/chart" uri="{C3380CC4-5D6E-409C-BE32-E72D297353CC}">
+                <c16:uniqueId val="{00000001-6B33-46F1-A934-BA87963A5A68}"/>
+              </c:ext>
+            </c:extLst>
           </c:dPt>
           <c:dPt>
             <c:idx val="1"/>
@@ -173,6 +185,11 @@
               </a:solidFill>
               <a:effectLst/>
             </c:spPr>
+            <c:extLst>
+              <c:ext xmlns:c16="http://schemas.microsoft.com/office/drawing/2014/chart" uri="{C3380CC4-5D6E-409C-BE32-E72D297353CC}">
+                <c16:uniqueId val="{00000003-6B33-46F1-A934-BA87963A5A68}"/>
+              </c:ext>
+            </c:extLst>
           </c:dPt>
           <c:dPt>
             <c:idx val="2"/>
@@ -183,6 +200,11 @@
               </a:solidFill>
               <a:effectLst/>
             </c:spPr>
+            <c:extLst>
+              <c:ext xmlns:c16="http://schemas.microsoft.com/office/drawing/2014/chart" uri="{C3380CC4-5D6E-409C-BE32-E72D297353CC}">
+                <c16:uniqueId val="{00000005-6B33-46F1-A934-BA87963A5A68}"/>
+              </c:ext>
+            </c:extLst>
           </c:dPt>
           <c:dLbls>
             <c:dLbl>
@@ -201,6 +223,7 @@
                       <a:latin typeface="Arial"/>
                     </a:defRPr>
                   </a:pPr>
+                  <a:endParaRPr lang="es-ES"/>
                 </a:p>
               </c:txPr>
               <c:showLegendKey val="0"/>
@@ -209,6 +232,12 @@
               <c:showSerName val="0"/>
               <c:showPercent val="1"/>
               <c:showBubbleSize val="0"/>
+              <c:extLst>
+                <c:ext xmlns:c15="http://schemas.microsoft.com/office/drawing/2012/chart" uri="{CE6537A1-D6FC-4f65-9D91-7224C49458BB}"/>
+                <c:ext xmlns:c16="http://schemas.microsoft.com/office/drawing/2014/chart" uri="{C3380CC4-5D6E-409C-BE32-E72D297353CC}">
+                  <c16:uniqueId val="{00000001-6B33-46F1-A934-BA87963A5A68}"/>
+                </c:ext>
+              </c:extLst>
             </c:dLbl>
             <c:dLbl>
               <c:idx val="1"/>
@@ -226,6 +255,7 @@
                       <a:latin typeface="Arial"/>
                     </a:defRPr>
                   </a:pPr>
+                  <a:endParaRPr lang="es-ES"/>
                 </a:p>
               </c:txPr>
               <c:showLegendKey val="0"/>
@@ -234,6 +264,12 @@
               <c:showSerName val="0"/>
               <c:showPercent val="1"/>
               <c:showBubbleSize val="0"/>
+              <c:extLst>
+                <c:ext xmlns:c15="http://schemas.microsoft.com/office/drawing/2012/chart" uri="{CE6537A1-D6FC-4f65-9D91-7224C49458BB}"/>
+                <c:ext xmlns:c16="http://schemas.microsoft.com/office/drawing/2014/chart" uri="{C3380CC4-5D6E-409C-BE32-E72D297353CC}">
+                  <c16:uniqueId val="{00000003-6B33-46F1-A934-BA87963A5A68}"/>
+                </c:ext>
+              </c:extLst>
             </c:dLbl>
             <c:dLbl>
               <c:idx val="2"/>
@@ -251,6 +287,7 @@
                       <a:latin typeface="Arial"/>
                     </a:defRPr>
                   </a:pPr>
+                  <a:endParaRPr lang="es-ES"/>
                 </a:p>
               </c:txPr>
               <c:showLegendKey val="0"/>
@@ -259,8 +296,21 @@
               <c:showSerName val="0"/>
               <c:showPercent val="1"/>
               <c:showBubbleSize val="0"/>
+              <c:extLst>
+                <c:ext xmlns:c15="http://schemas.microsoft.com/office/drawing/2012/chart" uri="{CE6537A1-D6FC-4f65-9D91-7224C49458BB}"/>
+                <c:ext xmlns:c16="http://schemas.microsoft.com/office/drawing/2014/chart" uri="{C3380CC4-5D6E-409C-BE32-E72D297353CC}">
+                  <c16:uniqueId val="{00000005-6B33-46F1-A934-BA87963A5A68}"/>
+                </c:ext>
+              </c:extLst>
             </c:dLbl>
             <c:numFmt formatCode="0%" sourceLinked="0"/>
+            <c:spPr>
+              <a:noFill/>
+              <a:ln>
+                <a:noFill/>
+              </a:ln>
+              <a:effectLst/>
+            </c:spPr>
             <c:txPr>
               <a:bodyPr/>
               <a:lstStyle/>
@@ -273,6 +323,7 @@
                     <a:latin typeface="Arial"/>
                   </a:defRPr>
                 </a:pPr>
+                <a:endParaRPr lang="es-ES"/>
               </a:p>
             </c:txPr>
             <c:showLegendKey val="0"/>
@@ -282,6 +333,9 @@
             <c:showPercent val="1"/>
             <c:showBubbleSize val="0"/>
             <c:showLeaderLines val="0"/>
+            <c:extLst>
+              <c:ext xmlns:c15="http://schemas.microsoft.com/office/drawing/2012/chart" uri="{CE6537A1-D6FC-4f65-9D91-7224C49458BB}"/>
+            </c:extLst>
           </c:dLbls>
           <c:cat>
             <c:strRef>
@@ -304,6 +358,7 @@
             <c:numRef>
               <c:f>Sheet1!$B$2:$B$4</c:f>
               <c:numCache>
+                <c:formatCode>General</c:formatCode>
                 <c:ptCount val="3"/>
                 <c:pt idx="0">
                   <c:v>77</c:v>
@@ -317,7 +372,21 @@
               </c:numCache>
             </c:numRef>
           </c:val>
+          <c:extLst>
+            <c:ext xmlns:c16="http://schemas.microsoft.com/office/drawing/2014/chart" uri="{C3380CC4-5D6E-409C-BE32-E72D297353CC}">
+              <c16:uniqueId val="{00000006-6B33-46F1-A934-BA87963A5A68}"/>
+            </c:ext>
+          </c:extLst>
         </c:ser>
+        <c:dLbls>
+          <c:showLegendKey val="0"/>
+          <c:showVal val="0"/>
+          <c:showCatName val="0"/>
+          <c:showSerName val="0"/>
+          <c:showPercent val="0"/>
+          <c:showBubbleSize val="0"/>
+          <c:showLeaderLines val="0"/>
+        </c:dLbls>
         <c:firstSliceAng val="0"/>
         <c:holeSize val="55"/>
       </c:doughnutChart>
@@ -349,6 +418,7 @@
     </c:legend>
     <c:plotVisOnly val="1"/>
     <c:dispBlanksAs val="span"/>
+    <c:showDLblsOverMax val="1"/>
   </c:chart>
   <c:spPr>
     <a:solidFill>
@@ -387,234 +457,10 @@
           <a:chExt cx="0" cy="0"/>
         </a:xfrm>
       </p:grpSpPr>
-      <p:sp>
-        <p:nvSpPr>
-          <p:cNvPr id="2" name="Header Placeholder 1"/>
-          <p:cNvSpPr>
-            <a:spLocks noGrp="1"/>
-          </p:cNvSpPr>
-          <p:nvPr>
-            <p:ph type="hdr" sz="quarter"/>
-          </p:nvPr>
-        </p:nvSpPr>
-        <p:spPr>
-          <a:xfrm>
-            <a:off x="0" y="0"/>
-            <a:ext cx="2971800" cy="458788"/>
-          </a:xfrm>
-          <a:prstGeom prst="rect">
-            <a:avLst/>
-          </a:prstGeom>
-        </p:spPr>
-        <p:txBody>
-          <a:bodyPr vert="horz" lIns="91440" tIns="45720" rIns="91440" bIns="45720" rtlCol="0"/>
-          <a:lstStyle>
-            <a:lvl1pPr algn="l">
-              <a:defRPr sz="1200"/>
-            </a:lvl1pPr>
-          </a:lstStyle>
-          <a:p>
-            <a:endParaRPr lang="en-US"/>
-          </a:p>
-        </p:txBody>
-      </p:sp>
-      <p:sp>
-        <p:nvSpPr>
-          <p:cNvPr id="3" name="Date Placeholder 2"/>
-          <p:cNvSpPr>
-            <a:spLocks noGrp="1"/>
-          </p:cNvSpPr>
-          <p:nvPr>
-            <p:ph type="dt" idx="1"/>
-          </p:nvPr>
-        </p:nvSpPr>
-        <p:spPr>
-          <a:xfrm>
-            <a:off x="3884613" y="0"/>
-            <a:ext cx="2971800" cy="458788"/>
-          </a:xfrm>
-          <a:prstGeom prst="rect">
-            <a:avLst/>
-          </a:prstGeom>
-        </p:spPr>
-        <p:txBody>
-          <a:bodyPr vert="horz" lIns="91440" tIns="45720" rIns="91440" bIns="45720" rtlCol="0"/>
-          <a:lstStyle>
-            <a:lvl1pPr algn="r">
-              <a:defRPr sz="1200"/>
-            </a:lvl1pPr>
-          </a:lstStyle>
-          <a:p>
-            <a:fld id="{5282F153-3F37-0F45-9E97-73ACFA13230C}" type="datetimeFigureOut">
-              <a:rPr lang="en-US"/>
-              <a:t>7/23/19</a:t>
-            </a:fld>
-            <a:endParaRPr lang="en-US"/>
-          </a:p>
-        </p:txBody>
-      </p:sp>
-      <p:sp>
-        <p:nvSpPr>
-          <p:cNvPr id="4" name="Slide Image Placeholder 3"/>
-          <p:cNvSpPr>
-            <a:spLocks noGrp="1" noRot="1" noChangeAspect="1"/>
-          </p:cNvSpPr>
-          <p:nvPr>
-            <p:ph type="sldImg" idx="2"/>
-          </p:nvPr>
-        </p:nvSpPr>
-        <p:spPr>
-          <a:xfrm>
-            <a:off x="685800" y="1143000"/>
-            <a:ext cx="5486400" cy="3086100"/>
-          </a:xfrm>
-          <a:prstGeom prst="rect">
-            <a:avLst/>
-          </a:prstGeom>
-          <a:noFill/>
-          <a:ln w="12700">
-            <a:solidFill>
-              <a:prstClr val="black"/>
-            </a:solidFill>
-          </a:ln>
-        </p:spPr>
-        <p:txBody>
-          <a:bodyPr vert="horz" lIns="91440" tIns="45720" rIns="91440" bIns="45720" rtlCol="0" anchor="ctr"/>
-          <a:lstStyle/>
-          <a:p>
-            <a:endParaRPr lang="en-US"/>
-          </a:p>
-        </p:txBody>
-      </p:sp>
-      <p:sp>
-        <p:nvSpPr>
-          <p:cNvPr id="5" name="Notes Placeholder 4"/>
-          <p:cNvSpPr>
-            <a:spLocks noGrp="1"/>
-          </p:cNvSpPr>
-          <p:nvPr>
-            <p:ph type="body" sz="quarter" idx="3"/>
-          </p:nvPr>
-        </p:nvSpPr>
-        <p:spPr>
-          <a:xfrm>
-            <a:off x="685800" y="4400550"/>
-            <a:ext cx="5486400" cy="3600450"/>
-          </a:xfrm>
-          <a:prstGeom prst="rect">
-            <a:avLst/>
-          </a:prstGeom>
-        </p:spPr>
-        <p:txBody>
-          <a:bodyPr vert="horz" lIns="91440" tIns="45720" rIns="91440" bIns="45720" rtlCol="0"/>
-          <a:lstStyle/>
-          <a:p>
-            <a:pPr lvl="0"/>
-            <a:r>
-              <a:rPr lang="en-US"/>
-              <a:t>Click to edit Master text styles</a:t>
-            </a:r>
-          </a:p>
-          <a:p>
-            <a:pPr lvl="1"/>
-            <a:r>
-              <a:rPr lang="en-US"/>
-              <a:t>Second level</a:t>
-            </a:r>
-          </a:p>
-          <a:p>
-            <a:pPr lvl="2"/>
-            <a:r>
-              <a:rPr lang="en-US"/>
-              <a:t>Third level</a:t>
-            </a:r>
-          </a:p>
-          <a:p>
-            <a:pPr lvl="3"/>
-            <a:r>
-              <a:rPr lang="en-US"/>
-              <a:t>Fourth level</a:t>
-            </a:r>
-          </a:p>
-          <a:p>
-            <a:pPr lvl="4"/>
-            <a:r>
-              <a:rPr lang="en-US"/>
-              <a:t>Fifth level</a:t>
-            </a:r>
-          </a:p>
-        </p:txBody>
-      </p:sp>
-      <p:sp>
-        <p:nvSpPr>
-          <p:cNvPr id="6" name="Footer Placeholder 5"/>
-          <p:cNvSpPr>
-            <a:spLocks noGrp="1"/>
-          </p:cNvSpPr>
-          <p:nvPr>
-            <p:ph type="ftr" sz="quarter" idx="4"/>
-          </p:nvPr>
-        </p:nvSpPr>
-        <p:spPr>
-          <a:xfrm>
-            <a:off x="0" y="8685213"/>
-            <a:ext cx="2971800" cy="458787"/>
-          </a:xfrm>
-          <a:prstGeom prst="rect">
-            <a:avLst/>
-          </a:prstGeom>
-        </p:spPr>
-        <p:txBody>
-          <a:bodyPr vert="horz" lIns="91440" tIns="45720" rIns="91440" bIns="45720" rtlCol="0" anchor="b"/>
-          <a:lstStyle>
-            <a:lvl1pPr algn="l">
-              <a:defRPr sz="1200"/>
-            </a:lvl1pPr>
-          </a:lstStyle>
-          <a:p>
-            <a:endParaRPr lang="en-US"/>
-          </a:p>
-        </p:txBody>
-      </p:sp>
-      <p:sp>
-        <p:nvSpPr>
-          <p:cNvPr id="7" name="Slide Number Placeholder 6"/>
-          <p:cNvSpPr>
-            <a:spLocks noGrp="1"/>
-          </p:cNvSpPr>
-          <p:nvPr>
-            <p:ph type="sldNum" sz="quarter" idx="5"/>
-          </p:nvPr>
-        </p:nvSpPr>
-        <p:spPr>
-          <a:xfrm>
-            <a:off x="3884613" y="8685213"/>
-            <a:ext cx="2971800" cy="458787"/>
-          </a:xfrm>
-          <a:prstGeom prst="rect">
-            <a:avLst/>
-          </a:prstGeom>
-        </p:spPr>
-        <p:txBody>
-          <a:bodyPr vert="horz" lIns="91440" tIns="45720" rIns="91440" bIns="45720" rtlCol="0" anchor="b"/>
-          <a:lstStyle>
-            <a:lvl1pPr algn="r">
-              <a:defRPr sz="1200"/>
-            </a:lvl1pPr>
-          </a:lstStyle>
-          <a:p>
-            <a:fld id="{CE5E9CC1-C706-0F49-92D6-E571CC5EEA8F}" type="slidenum">
-              <a:rPr lang="en-US"/>
-              <a:t>‹#›</a:t>
-            </a:fld>
-            <a:endParaRPr lang="en-US"/>
-          </a:p>
-        </p:txBody>
-      </p:sp>
     </p:spTree>
     <p:extLst>
       <p:ext uri="{BB962C8B-B14F-4D97-AF65-F5344CB8AC3E}">
-        <p14:creationId xmlns:p14="http://schemas.microsoft.com/office/powerpoint/2010/main" val="1024086991"/>
+        <p14:creationId xmlns:p14="http://schemas.microsoft.com/office/powerpoint/2010/main" val="4147117470"/>
       </p:ext>
     </p:extLst>
   </p:cSld>
@@ -758,10 +604,6 @@
           <a:bodyPr/>
           <a:lstStyle/>
           <a:p>
-            <a:r>
-              <a:rPr lang="en-US" dirty="0"/>
-              <a:t/>
-            </a:r>
             <a:endParaRPr lang="en-US" dirty="0"/>
           </a:p>
         </p:txBody>
@@ -846,10 +688,6 @@
           <a:bodyPr/>
           <a:lstStyle/>
           <a:p>
-            <a:r>
-              <a:rPr lang="en-US" dirty="0"/>
-              <a:t/>
-            </a:r>
             <a:endParaRPr lang="en-US" dirty="0"/>
           </a:p>
         </p:txBody>
@@ -934,10 +772,6 @@
           <a:bodyPr/>
           <a:lstStyle/>
           <a:p>
-            <a:r>
-              <a:rPr lang="en-US" dirty="0"/>
-              <a:t/>
-            </a:r>
             <a:endParaRPr lang="en-US" dirty="0"/>
           </a:p>
         </p:txBody>
@@ -1022,10 +856,6 @@
           <a:bodyPr/>
           <a:lstStyle/>
           <a:p>
-            <a:r>
-              <a:rPr lang="en-US" dirty="0"/>
-              <a:t/>
-            </a:r>
             <a:endParaRPr lang="en-US" dirty="0"/>
           </a:p>
         </p:txBody>
@@ -1110,10 +940,6 @@
           <a:bodyPr/>
           <a:lstStyle/>
           <a:p>
-            <a:r>
-              <a:rPr lang="en-US" dirty="0"/>
-              <a:t/>
-            </a:r>
             <a:endParaRPr lang="en-US" dirty="0"/>
           </a:p>
         </p:txBody>
@@ -1198,10 +1024,6 @@
           <a:bodyPr/>
           <a:lstStyle/>
           <a:p>
-            <a:r>
-              <a:rPr lang="en-US" dirty="0"/>
-              <a:t/>
-            </a:r>
             <a:endParaRPr lang="en-US" dirty="0"/>
           </a:p>
         </p:txBody>
@@ -1286,10 +1108,6 @@
           <a:bodyPr/>
           <a:lstStyle/>
           <a:p>
-            <a:r>
-              <a:rPr lang="en-US" dirty="0"/>
-              <a:t/>
-            </a:r>
             <a:endParaRPr lang="en-US" dirty="0"/>
           </a:p>
         </p:txBody>
@@ -1374,10 +1192,6 @@
           <a:bodyPr/>
           <a:lstStyle/>
           <a:p>
-            <a:r>
-              <a:rPr lang="en-US" dirty="0"/>
-              <a:t/>
-            </a:r>
             <a:endParaRPr lang="en-US" dirty="0"/>
           </a:p>
         </p:txBody>
@@ -1462,10 +1276,6 @@
           <a:bodyPr/>
           <a:lstStyle/>
           <a:p>
-            <a:r>
-              <a:rPr lang="en-US" dirty="0"/>
-              <a:t/>
-            </a:r>
             <a:endParaRPr lang="en-US" dirty="0"/>
           </a:p>
         </p:txBody>
@@ -1550,10 +1360,6 @@
           <a:bodyPr/>
           <a:lstStyle/>
           <a:p>
-            <a:r>
-              <a:rPr lang="en-US" dirty="0"/>
-              <a:t/>
-            </a:r>
             <a:endParaRPr lang="en-US" dirty="0"/>
           </a:p>
         </p:txBody>
@@ -1638,10 +1444,6 @@
           <a:bodyPr/>
           <a:lstStyle/>
           <a:p>
-            <a:r>
-              <a:rPr lang="en-US" dirty="0"/>
-              <a:t/>
-            </a:r>
             <a:endParaRPr lang="en-US" dirty="0"/>
           </a:p>
         </p:txBody>
@@ -1715,6 +1517,11 @@
 <file path=ppt/slideMasters/slideMaster1.xml><?xml version="1.0" encoding="utf-8"?>
 <p:sldMaster xmlns:a="http://schemas.openxmlformats.org/drawingml/2006/main" xmlns:r="http://schemas.openxmlformats.org/officeDocument/2006/relationships" xmlns:p="http://schemas.openxmlformats.org/presentationml/2006/main">
   <p:cSld>
+    <p:bg>
+      <p:bgRef idx="1001">
+        <a:schemeClr val="bg1"/>
+      </p:bgRef>
+    </p:bg>
     <p:spTree>
       <p:nvGrpSpPr>
         <p:cNvPr id="1" name=""/>
@@ -1997,6 +1804,7 @@
         <a:solidFill>
           <a:srgbClr val="0D1B3E"/>
         </a:solidFill>
+        <a:effectLst/>
       </p:bgPr>
     </p:bg>
     <p:spTree>
@@ -2128,11 +1936,11 @@
           <a:bodyPr wrap="square" lIns="0" tIns="0" rIns="0" bIns="0" rtlCol="0" anchor="ctr"/>
           <a:lstStyle/>
           <a:p>
-            <a:pPr indent="0" marL="0">
-              <a:buNone/>
-            </a:pPr>
-            <a:r>
-              <a:rPr lang="en-US" sz="1000" b="1" spc="300" kern="0" dirty="0">
+            <a:pPr marL="0" indent="0">
+              <a:buNone/>
+            </a:pPr>
+            <a:r>
+              <a:rPr lang="en-US" sz="1000" b="1" kern="0" spc="300" dirty="0">
                 <a:solidFill>
                   <a:srgbClr val="00B4D8"/>
                 </a:solidFill>
@@ -2167,7 +1975,7 @@
           <a:bodyPr wrap="square" rtlCol="0" anchor="ctr"/>
           <a:lstStyle/>
           <a:p>
-            <a:pPr indent="0" marL="0">
+            <a:pPr marL="0" indent="0">
               <a:lnSpc>
                 <a:spcPct val="110000"/>
               </a:lnSpc>
@@ -2187,7 +1995,7 @@
             <a:endParaRPr lang="en-US" sz="4600" dirty="0"/>
           </a:p>
           <a:p>
-            <a:pPr indent="0" marL="0">
+            <a:pPr marL="0" indent="0">
               <a:lnSpc>
                 <a:spcPct val="110000"/>
               </a:lnSpc>
@@ -2229,7 +2037,7 @@
           <a:bodyPr wrap="square" rtlCol="0" anchor="ctr"/>
           <a:lstStyle/>
           <a:p>
-            <a:pPr indent="0" marL="0">
+            <a:pPr marL="0" indent="0">
               <a:buNone/>
             </a:pPr>
             <a:r>
@@ -2246,7 +2054,7 @@
             <a:endParaRPr lang="en-US" sz="1500" dirty="0"/>
           </a:p>
           <a:p>
-            <a:pPr indent="0" marL="0">
+            <a:pPr marL="0" indent="0">
               <a:buNone/>
             </a:pPr>
             <a:r>
@@ -2285,7 +2093,7 @@
           <a:bodyPr wrap="square" lIns="0" tIns="0" rIns="0" bIns="0" rtlCol="0" anchor="ctr"/>
           <a:lstStyle/>
           <a:p>
-            <a:pPr indent="0" marL="0">
+            <a:pPr marL="0" indent="0">
               <a:buNone/>
             </a:pPr>
             <a:r>
@@ -2324,7 +2132,7 @@
           <a:bodyPr wrap="square" lIns="0" tIns="0" rIns="0" bIns="0" rtlCol="0" anchor="ctr"/>
           <a:lstStyle/>
           <a:p>
-            <a:pPr indent="0" marL="0">
+            <a:pPr marL="0" indent="0">
               <a:buNone/>
             </a:pPr>
             <a:r>
@@ -2341,7 +2149,7 @@
             <a:endParaRPr lang="en-US" sz="900" dirty="0"/>
           </a:p>
           <a:p>
-            <a:pPr indent="0" marL="0">
+            <a:pPr marL="0" indent="0">
               <a:buNone/>
             </a:pPr>
             <a:r>
@@ -2380,7 +2188,7 @@
           <a:bodyPr wrap="square" lIns="0" tIns="0" rIns="0" bIns="0" rtlCol="0" anchor="ctr"/>
           <a:lstStyle/>
           <a:p>
-            <a:pPr indent="0" marL="0">
+            <a:pPr marL="0" indent="0">
               <a:buNone/>
             </a:pPr>
             <a:r>
@@ -2419,7 +2227,7 @@
           <a:bodyPr wrap="square" lIns="0" tIns="0" rIns="0" bIns="0" rtlCol="0" anchor="ctr"/>
           <a:lstStyle/>
           <a:p>
-            <a:pPr indent="0" marL="0">
+            <a:pPr marL="0" indent="0">
               <a:buNone/>
             </a:pPr>
             <a:r>
@@ -2436,7 +2244,7 @@
             <a:endParaRPr lang="en-US" sz="900" dirty="0"/>
           </a:p>
           <a:p>
-            <a:pPr indent="0" marL="0">
+            <a:pPr marL="0" indent="0">
               <a:buNone/>
             </a:pPr>
             <a:r>
@@ -2475,7 +2283,7 @@
           <a:bodyPr wrap="square" lIns="0" tIns="0" rIns="0" bIns="0" rtlCol="0" anchor="ctr"/>
           <a:lstStyle/>
           <a:p>
-            <a:pPr indent="0" marL="0">
+            <a:pPr marL="0" indent="0">
               <a:buNone/>
             </a:pPr>
             <a:r>
@@ -2514,7 +2322,7 @@
           <a:bodyPr wrap="square" lIns="0" tIns="0" rIns="0" bIns="0" rtlCol="0" anchor="ctr"/>
           <a:lstStyle/>
           <a:p>
-            <a:pPr indent="0" marL="0">
+            <a:pPr marL="0" indent="0">
               <a:buNone/>
             </a:pPr>
             <a:r>
@@ -2531,7 +2339,7 @@
             <a:endParaRPr lang="en-US" sz="900" dirty="0"/>
           </a:p>
           <a:p>
-            <a:pPr indent="0" marL="0">
+            <a:pPr marL="0" indent="0">
               <a:buNone/>
             </a:pPr>
             <a:r>
@@ -2570,7 +2378,7 @@
           <a:bodyPr wrap="square" lIns="0" tIns="0" rIns="0" bIns="0" rtlCol="0" anchor="ctr"/>
           <a:lstStyle/>
           <a:p>
-            <a:pPr indent="0" marL="0">
+            <a:pPr marL="0" indent="0">
               <a:buNone/>
             </a:pPr>
             <a:r>
@@ -2609,7 +2417,7 @@
           <a:bodyPr wrap="square" lIns="0" tIns="0" rIns="0" bIns="0" rtlCol="0" anchor="ctr"/>
           <a:lstStyle/>
           <a:p>
-            <a:pPr indent="0" marL="0">
+            <a:pPr marL="0" indent="0">
               <a:buNone/>
             </a:pPr>
             <a:r>
@@ -2626,7 +2434,7 @@
             <a:endParaRPr lang="en-US" sz="900" dirty="0"/>
           </a:p>
           <a:p>
-            <a:pPr indent="0" marL="0">
+            <a:pPr marL="0" indent="0">
               <a:buNone/>
             </a:pPr>
             <a:r>
@@ -2660,6 +2468,7 @@
         <a:solidFill>
           <a:srgbClr val="0D1B3E"/>
         </a:solidFill>
+        <a:effectLst/>
       </p:bgPr>
     </p:bg>
     <p:spTree>
@@ -2717,7 +2526,7 @@
           <a:bodyPr wrap="square" lIns="0" tIns="0" rIns="0" bIns="0" rtlCol="0" anchor="ctr"/>
           <a:lstStyle/>
           <a:p>
-            <a:pPr indent="0" marL="0">
+            <a:pPr marL="0" indent="0">
               <a:buNone/>
             </a:pPr>
             <a:r>
@@ -2776,7 +2585,7 @@
           <a:bodyPr wrap="square" lIns="0" tIns="0" rIns="0" bIns="0" rtlCol="0" anchor="ctr"/>
           <a:lstStyle/>
           <a:p>
-            <a:pPr indent="0" marL="0">
+            <a:pPr marL="0" indent="0">
               <a:buNone/>
             </a:pPr>
             <a:r>
@@ -2835,7 +2644,7 @@
           <a:bodyPr wrap="square" lIns="0" tIns="0" rIns="0" bIns="0" rtlCol="0" anchor="ctr"/>
           <a:lstStyle/>
           <a:p>
-            <a:pPr indent="0" marL="0">
+            <a:pPr marL="0" indent="0">
               <a:buNone/>
             </a:pPr>
             <a:r>
@@ -2874,7 +2683,7 @@
           <a:bodyPr wrap="square" lIns="0" tIns="0" rIns="0" bIns="0" rtlCol="0" anchor="ctr"/>
           <a:lstStyle/>
           <a:p>
-            <a:pPr indent="0" marL="0">
+            <a:pPr marL="0" indent="0">
               <a:buNone/>
             </a:pPr>
             <a:r>
@@ -2913,7 +2722,7 @@
           <a:bodyPr wrap="square" lIns="0" tIns="0" rIns="0" bIns="0" rtlCol="0" anchor="ctr"/>
           <a:lstStyle/>
           <a:p>
-            <a:pPr algn="r" indent="0" marL="0">
+            <a:pPr marL="0" indent="0" algn="r">
               <a:buNone/>
             </a:pPr>
             <a:r>
@@ -2972,7 +2781,7 @@
           <a:bodyPr wrap="square" lIns="0" tIns="0" rIns="0" bIns="0" rtlCol="0" anchor="ctr"/>
           <a:lstStyle/>
           <a:p>
-            <a:pPr indent="0" marL="0">
+            <a:pPr marL="0" indent="0">
               <a:buNone/>
             </a:pPr>
             <a:r>
@@ -3011,7 +2820,7 @@
           <a:bodyPr wrap="square" lIns="0" tIns="0" rIns="0" bIns="0" rtlCol="0" anchor="ctr"/>
           <a:lstStyle/>
           <a:p>
-            <a:pPr indent="0" marL="0">
+            <a:pPr marL="0" indent="0">
               <a:buNone/>
             </a:pPr>
             <a:r>
@@ -3050,7 +2859,7 @@
           <a:bodyPr wrap="square" lIns="0" tIns="0" rIns="0" bIns="0" rtlCol="0" anchor="ctr"/>
           <a:lstStyle/>
           <a:p>
-            <a:pPr algn="r" indent="0" marL="0">
+            <a:pPr marL="0" indent="0" algn="r">
               <a:buNone/>
             </a:pPr>
             <a:r>
@@ -3109,7 +2918,7 @@
           <a:bodyPr wrap="square" lIns="0" tIns="0" rIns="0" bIns="0" rtlCol="0" anchor="ctr"/>
           <a:lstStyle/>
           <a:p>
-            <a:pPr indent="0" marL="0">
+            <a:pPr marL="0" indent="0">
               <a:buNone/>
             </a:pPr>
             <a:r>
@@ -3148,7 +2957,7 @@
           <a:bodyPr wrap="square" lIns="0" tIns="0" rIns="0" bIns="0" rtlCol="0" anchor="ctr"/>
           <a:lstStyle/>
           <a:p>
-            <a:pPr indent="0" marL="0">
+            <a:pPr marL="0" indent="0">
               <a:buNone/>
             </a:pPr>
             <a:r>
@@ -3187,7 +2996,7 @@
           <a:bodyPr wrap="square" lIns="0" tIns="0" rIns="0" bIns="0" rtlCol="0" anchor="ctr"/>
           <a:lstStyle/>
           <a:p>
-            <a:pPr algn="r" indent="0" marL="0">
+            <a:pPr marL="0" indent="0" algn="r">
               <a:buNone/>
             </a:pPr>
             <a:r>
@@ -3246,7 +3055,7 @@
           <a:bodyPr wrap="square" lIns="0" tIns="0" rIns="0" bIns="0" rtlCol="0" anchor="ctr"/>
           <a:lstStyle/>
           <a:p>
-            <a:pPr indent="0" marL="0">
+            <a:pPr marL="0" indent="0">
               <a:buNone/>
             </a:pPr>
             <a:r>
@@ -3285,7 +3094,7 @@
           <a:bodyPr wrap="square" lIns="0" tIns="0" rIns="0" bIns="0" rtlCol="0" anchor="ctr"/>
           <a:lstStyle/>
           <a:p>
-            <a:pPr indent="0" marL="0">
+            <a:pPr marL="0" indent="0">
               <a:buNone/>
             </a:pPr>
             <a:r>
@@ -3324,7 +3133,7 @@
           <a:bodyPr wrap="square" lIns="0" tIns="0" rIns="0" bIns="0" rtlCol="0" anchor="ctr"/>
           <a:lstStyle/>
           <a:p>
-            <a:pPr algn="r" indent="0" marL="0">
+            <a:pPr marL="0" indent="0" algn="r">
               <a:buNone/>
             </a:pPr>
             <a:r>
@@ -3403,7 +3212,7 @@
           <a:bodyPr wrap="square" lIns="0" tIns="0" rIns="0" bIns="0" rtlCol="0" anchor="ctr"/>
           <a:lstStyle/>
           <a:p>
-            <a:pPr indent="0" marL="0">
+            <a:pPr marL="0" indent="0">
               <a:buNone/>
             </a:pPr>
             <a:r>
@@ -3442,7 +3251,7 @@
           <a:bodyPr wrap="square" lIns="0" tIns="0" rIns="0" bIns="0" rtlCol="0" anchor="ctr"/>
           <a:lstStyle/>
           <a:p>
-            <a:pPr indent="0" marL="0">
+            <a:pPr marL="0" indent="0">
               <a:buNone/>
             </a:pPr>
             <a:r>
@@ -3481,7 +3290,7 @@
           <a:bodyPr wrap="square" lIns="0" tIns="0" rIns="0" bIns="0" rtlCol="0" anchor="ctr"/>
           <a:lstStyle/>
           <a:p>
-            <a:pPr algn="r" indent="0" marL="0">
+            <a:pPr marL="0" indent="0" algn="r">
               <a:buNone/>
             </a:pPr>
             <a:r>
@@ -3540,7 +3349,7 @@
           <a:bodyPr wrap="square" lIns="0" tIns="0" rIns="0" bIns="0" rtlCol="0" anchor="ctr"/>
           <a:lstStyle/>
           <a:p>
-            <a:pPr indent="0" marL="0">
+            <a:pPr marL="0" indent="0">
               <a:buNone/>
             </a:pPr>
             <a:r>
@@ -3579,7 +3388,7 @@
           <a:bodyPr wrap="square" lIns="0" tIns="0" rIns="0" bIns="0" rtlCol="0" anchor="ctr"/>
           <a:lstStyle/>
           <a:p>
-            <a:pPr indent="0" marL="0">
+            <a:pPr marL="0" indent="0">
               <a:buNone/>
             </a:pPr>
             <a:r>
@@ -3618,7 +3427,7 @@
           <a:bodyPr wrap="square" lIns="0" tIns="0" rIns="0" bIns="0" rtlCol="0" anchor="ctr"/>
           <a:lstStyle/>
           <a:p>
-            <a:pPr algn="r" indent="0" marL="0">
+            <a:pPr marL="0" indent="0" algn="r">
               <a:buNone/>
             </a:pPr>
             <a:r>
@@ -3677,7 +3486,7 @@
           <a:bodyPr wrap="square" lIns="0" tIns="0" rIns="0" bIns="0" rtlCol="0" anchor="ctr"/>
           <a:lstStyle/>
           <a:p>
-            <a:pPr indent="0" marL="0">
+            <a:pPr marL="0" indent="0">
               <a:buNone/>
             </a:pPr>
             <a:r>
@@ -3716,7 +3525,7 @@
           <a:bodyPr wrap="square" lIns="0" tIns="0" rIns="0" bIns="0" rtlCol="0" anchor="ctr"/>
           <a:lstStyle/>
           <a:p>
-            <a:pPr indent="0" marL="0">
+            <a:pPr marL="0" indent="0">
               <a:buNone/>
             </a:pPr>
             <a:r>
@@ -3755,7 +3564,7 @@
           <a:bodyPr wrap="square" lIns="0" tIns="0" rIns="0" bIns="0" rtlCol="0" anchor="ctr"/>
           <a:lstStyle/>
           <a:p>
-            <a:pPr algn="r" indent="0" marL="0">
+            <a:pPr marL="0" indent="0" algn="r">
               <a:buNone/>
             </a:pPr>
             <a:r>
@@ -3814,7 +3623,7 @@
           <a:bodyPr wrap="square" lIns="0" tIns="0" rIns="0" bIns="0" rtlCol="0" anchor="ctr"/>
           <a:lstStyle/>
           <a:p>
-            <a:pPr indent="0" marL="0">
+            <a:pPr marL="0" indent="0">
               <a:buNone/>
             </a:pPr>
             <a:r>
@@ -3853,7 +3662,7 @@
           <a:bodyPr wrap="square" lIns="0" tIns="0" rIns="0" bIns="0" rtlCol="0" anchor="ctr"/>
           <a:lstStyle/>
           <a:p>
-            <a:pPr indent="0" marL="0">
+            <a:pPr marL="0" indent="0">
               <a:buNone/>
             </a:pPr>
             <a:r>
@@ -3892,7 +3701,7 @@
           <a:bodyPr wrap="square" lIns="0" tIns="0" rIns="0" bIns="0" rtlCol="0" anchor="ctr"/>
           <a:lstStyle/>
           <a:p>
-            <a:pPr algn="r" indent="0" marL="0">
+            <a:pPr marL="0" indent="0" algn="r">
               <a:buNone/>
             </a:pPr>
             <a:r>
@@ -3951,7 +3760,7 @@
           <a:bodyPr wrap="square" lIns="0" tIns="0" rIns="0" bIns="0" rtlCol="0" anchor="ctr"/>
           <a:lstStyle/>
           <a:p>
-            <a:pPr indent="0" marL="0">
+            <a:pPr marL="0" indent="0">
               <a:buNone/>
             </a:pPr>
             <a:r>
@@ -3990,7 +3799,7 @@
           <a:bodyPr wrap="square" lIns="0" tIns="0" rIns="0" bIns="0" rtlCol="0" anchor="ctr"/>
           <a:lstStyle/>
           <a:p>
-            <a:pPr indent="0" marL="0">
+            <a:pPr marL="0" indent="0">
               <a:buNone/>
             </a:pPr>
             <a:r>
@@ -4029,7 +3838,7 @@
           <a:bodyPr wrap="square" lIns="0" tIns="0" rIns="0" bIns="0" rtlCol="0" anchor="ctr"/>
           <a:lstStyle/>
           <a:p>
-            <a:pPr algn="r" indent="0" marL="0">
+            <a:pPr marL="0" indent="0" algn="r">
               <a:buNone/>
             </a:pPr>
             <a:r>
@@ -4088,7 +3897,7 @@
           <a:bodyPr wrap="square" lIns="0" tIns="0" rIns="0" bIns="0" rtlCol="0" anchor="ctr"/>
           <a:lstStyle/>
           <a:p>
-            <a:pPr indent="0" marL="0">
+            <a:pPr marL="0" indent="0">
               <a:buNone/>
             </a:pPr>
             <a:r>
@@ -4127,7 +3936,7 @@
           <a:bodyPr wrap="square" lIns="0" tIns="0" rIns="0" bIns="0" rtlCol="0" anchor="ctr"/>
           <a:lstStyle/>
           <a:p>
-            <a:pPr indent="0" marL="0">
+            <a:pPr marL="0" indent="0">
               <a:buNone/>
             </a:pPr>
             <a:r>
@@ -4166,7 +3975,7 @@
           <a:bodyPr wrap="square" lIns="0" tIns="0" rIns="0" bIns="0" rtlCol="0" anchor="ctr"/>
           <a:lstStyle/>
           <a:p>
-            <a:pPr algn="r" indent="0" marL="0">
+            <a:pPr marL="0" indent="0" algn="r">
               <a:buNone/>
             </a:pPr>
             <a:r>
@@ -4225,7 +4034,7 @@
           <a:bodyPr wrap="square" lIns="0" tIns="0" rIns="0" bIns="0" rtlCol="0" anchor="ctr"/>
           <a:lstStyle/>
           <a:p>
-            <a:pPr indent="0" marL="0">
+            <a:pPr marL="0" indent="0">
               <a:buNone/>
             </a:pPr>
             <a:r>
@@ -4259,6 +4068,7 @@
         <a:solidFill>
           <a:srgbClr val="0D1B3E"/>
         </a:solidFill>
+        <a:effectLst/>
       </p:bgPr>
     </p:bg>
     <p:spTree>
@@ -4370,11 +4180,11 @@
           <a:bodyPr wrap="square" lIns="0" tIns="0" rIns="0" bIns="0" rtlCol="0" anchor="ctr"/>
           <a:lstStyle/>
           <a:p>
-            <a:pPr indent="0" marL="0">
-              <a:buNone/>
-            </a:pPr>
-            <a:r>
-              <a:rPr lang="en-US" sz="1400" b="1" spc="300" kern="0" dirty="0">
+            <a:pPr marL="0" indent="0">
+              <a:buNone/>
+            </a:pPr>
+            <a:r>
+              <a:rPr lang="en-US" sz="1400" b="1" kern="0" spc="300" dirty="0">
                 <a:solidFill>
                   <a:srgbClr val="00B4D8"/>
                 </a:solidFill>
@@ -4409,7 +4219,7 @@
           <a:bodyPr wrap="square" lIns="0" tIns="0" rIns="0" bIns="0" rtlCol="0" anchor="ctr"/>
           <a:lstStyle/>
           <a:p>
-            <a:pPr indent="0" marL="0">
+            <a:pPr marL="0" indent="0">
               <a:buNone/>
             </a:pPr>
             <a:r>
@@ -4470,7 +4280,7 @@
           <a:bodyPr wrap="square" lIns="0" tIns="0" rIns="0" bIns="0" rtlCol="0" anchor="ctr"/>
           <a:lstStyle/>
           <a:p>
-            <a:pPr indent="0" marL="0">
+            <a:pPr marL="0" indent="0">
               <a:buNone/>
             </a:pPr>
             <a:r>
@@ -4509,7 +4319,7 @@
           <a:bodyPr wrap="square" rtlCol="0" anchor="ctr"/>
           <a:lstStyle/>
           <a:p>
-            <a:pPr indent="0" marL="0">
+            <a:pPr marL="0" indent="0">
               <a:buNone/>
             </a:pPr>
             <a:r>
@@ -4593,7 +4403,7 @@
           <a:bodyPr wrap="square" lIns="0" tIns="0" rIns="0" bIns="0" rtlCol="0" anchor="ctr"/>
           <a:lstStyle/>
           <a:p>
-            <a:pPr indent="0" marL="0">
+            <a:pPr marL="0" indent="0">
               <a:buNone/>
             </a:pPr>
             <a:r>
@@ -4632,7 +4442,7 @@
           <a:bodyPr wrap="square" rtlCol="0" anchor="ctr"/>
           <a:lstStyle/>
           <a:p>
-            <a:pPr indent="0" marL="0">
+            <a:pPr marL="0" indent="0">
               <a:buNone/>
             </a:pPr>
             <a:r>
@@ -4716,7 +4526,7 @@
           <a:bodyPr wrap="square" lIns="0" tIns="0" rIns="0" bIns="0" rtlCol="0" anchor="ctr"/>
           <a:lstStyle/>
           <a:p>
-            <a:pPr indent="0" marL="0">
+            <a:pPr marL="0" indent="0">
               <a:buNone/>
             </a:pPr>
             <a:r>
@@ -4755,7 +4565,7 @@
           <a:bodyPr wrap="square" rtlCol="0" anchor="ctr"/>
           <a:lstStyle/>
           <a:p>
-            <a:pPr indent="0" marL="0">
+            <a:pPr marL="0" indent="0">
               <a:buNone/>
             </a:pPr>
             <a:r>
@@ -4839,7 +4649,7 @@
           <a:bodyPr wrap="square" lIns="0" tIns="0" rIns="0" bIns="0" rtlCol="0" anchor="ctr"/>
           <a:lstStyle/>
           <a:p>
-            <a:pPr indent="0" marL="0">
+            <a:pPr marL="0" indent="0">
               <a:buNone/>
             </a:pPr>
             <a:r>
@@ -4878,7 +4688,7 @@
           <a:bodyPr wrap="square" rtlCol="0" anchor="ctr"/>
           <a:lstStyle/>
           <a:p>
-            <a:pPr indent="0" marL="0">
+            <a:pPr marL="0" indent="0">
               <a:buNone/>
             </a:pPr>
             <a:r>
@@ -4940,7 +4750,7 @@
           <a:bodyPr wrap="square" lIns="0" tIns="0" rIns="0" bIns="0" rtlCol="0" anchor="ctr"/>
           <a:lstStyle/>
           <a:p>
-            <a:pPr indent="0" marL="0">
+            <a:pPr marL="0" indent="0">
               <a:buNone/>
             </a:pPr>
             <a:r>
@@ -4974,6 +4784,7 @@
         <a:solidFill>
           <a:srgbClr val="F0F4F8"/>
         </a:solidFill>
+        <a:effectLst/>
       </p:bgPr>
     </p:bg>
     <p:spTree>
@@ -5051,7 +4862,7 @@
           <a:bodyPr wrap="square" lIns="0" tIns="0" rIns="0" bIns="0" rtlCol="0" anchor="ctr"/>
           <a:lstStyle/>
           <a:p>
-            <a:pPr indent="0" marL="0">
+            <a:pPr marL="0" indent="0">
               <a:buNone/>
             </a:pPr>
             <a:r>
@@ -5088,7 +4899,7 @@
           </a:solidFill>
           <a:ln/>
           <a:effectLst>
-            <a:outerShdw sx="100000" sy="100000" kx="0" ky="0" algn="bl" rotWithShape="0" blurRad="101600" dist="38100" dir="8100000">
+            <a:outerShdw blurRad="101600" dist="38100" dir="8100000" algn="bl" rotWithShape="0">
               <a:srgbClr val="000000">
                 <a:alpha val="15000"/>
               </a:srgbClr>
@@ -5137,7 +4948,7 @@
           <a:bodyPr wrap="square" lIns="0" tIns="0" rIns="0" bIns="0" rtlCol="0" anchor="ctr"/>
           <a:lstStyle/>
           <a:p>
-            <a:pPr algn="ctr" indent="0" marL="0">
+            <a:pPr marL="0" indent="0" algn="ctr">
               <a:buNone/>
             </a:pPr>
             <a:r>
@@ -5173,7 +4984,7 @@
           <a:bodyPr wrap="square" lIns="0" tIns="0" rIns="0" bIns="0" rtlCol="0" anchor="ctr"/>
           <a:lstStyle/>
           <a:p>
-            <a:pPr algn="ctr" indent="0" marL="0">
+            <a:pPr marL="0" indent="0" algn="ctr">
               <a:buNone/>
             </a:pPr>
             <a:r>
@@ -5212,7 +5023,7 @@
           <a:bodyPr wrap="square" rtlCol="0" anchor="ctr"/>
           <a:lstStyle/>
           <a:p>
-            <a:pPr algn="l" indent="0" marL="0">
+            <a:pPr marL="0" indent="0" algn="l">
               <a:buNone/>
             </a:pPr>
             <a:r>
@@ -5249,7 +5060,7 @@
           </a:solidFill>
           <a:ln/>
           <a:effectLst>
-            <a:outerShdw sx="100000" sy="100000" kx="0" ky="0" algn="bl" rotWithShape="0" blurRad="101600" dist="38100" dir="8100000">
+            <a:outerShdw blurRad="101600" dist="38100" dir="8100000" algn="bl" rotWithShape="0">
               <a:srgbClr val="000000">
                 <a:alpha val="15000"/>
               </a:srgbClr>
@@ -5298,7 +5109,7 @@
           <a:bodyPr wrap="square" lIns="0" tIns="0" rIns="0" bIns="0" rtlCol="0" anchor="ctr"/>
           <a:lstStyle/>
           <a:p>
-            <a:pPr algn="ctr" indent="0" marL="0">
+            <a:pPr marL="0" indent="0" algn="ctr">
               <a:buNone/>
             </a:pPr>
             <a:r>
@@ -5334,7 +5145,7 @@
           <a:bodyPr wrap="square" lIns="0" tIns="0" rIns="0" bIns="0" rtlCol="0" anchor="ctr"/>
           <a:lstStyle/>
           <a:p>
-            <a:pPr algn="ctr" indent="0" marL="0">
+            <a:pPr marL="0" indent="0" algn="ctr">
               <a:buNone/>
             </a:pPr>
             <a:r>
@@ -5373,7 +5184,7 @@
           <a:bodyPr wrap="square" rtlCol="0" anchor="ctr"/>
           <a:lstStyle/>
           <a:p>
-            <a:pPr algn="l" indent="0" marL="0">
+            <a:pPr marL="0" indent="0" algn="l">
               <a:buNone/>
             </a:pPr>
             <a:r>
@@ -5410,7 +5221,7 @@
           </a:solidFill>
           <a:ln/>
           <a:effectLst>
-            <a:outerShdw sx="100000" sy="100000" kx="0" ky="0" algn="bl" rotWithShape="0" blurRad="101600" dist="38100" dir="8100000">
+            <a:outerShdw blurRad="101600" dist="38100" dir="8100000" algn="bl" rotWithShape="0">
               <a:srgbClr val="000000">
                 <a:alpha val="15000"/>
               </a:srgbClr>
@@ -5459,7 +5270,7 @@
           <a:bodyPr wrap="square" lIns="0" tIns="0" rIns="0" bIns="0" rtlCol="0" anchor="ctr"/>
           <a:lstStyle/>
           <a:p>
-            <a:pPr algn="ctr" indent="0" marL="0">
+            <a:pPr marL="0" indent="0" algn="ctr">
               <a:buNone/>
             </a:pPr>
             <a:r>
@@ -5495,7 +5306,7 @@
           <a:bodyPr wrap="square" lIns="0" tIns="0" rIns="0" bIns="0" rtlCol="0" anchor="ctr"/>
           <a:lstStyle/>
           <a:p>
-            <a:pPr algn="ctr" indent="0" marL="0">
+            <a:pPr marL="0" indent="0" algn="ctr">
               <a:buNone/>
             </a:pPr>
             <a:r>
@@ -5534,7 +5345,7 @@
           <a:bodyPr wrap="square" rtlCol="0" anchor="ctr"/>
           <a:lstStyle/>
           <a:p>
-            <a:pPr algn="l" indent="0" marL="0">
+            <a:pPr marL="0" indent="0" algn="l">
               <a:buNone/>
             </a:pPr>
             <a:r>
@@ -5593,7 +5404,7 @@
           <a:bodyPr wrap="square" lIns="0" tIns="0" rIns="0" bIns="0" rtlCol="0" anchor="ctr"/>
           <a:lstStyle/>
           <a:p>
-            <a:pPr indent="0" marL="0">
+            <a:pPr marL="0" indent="0">
               <a:buNone/>
             </a:pPr>
             <a:r>
@@ -5627,6 +5438,7 @@
         <a:solidFill>
           <a:srgbClr val="0D1B3E"/>
         </a:solidFill>
+        <a:effectLst/>
       </p:bgPr>
     </p:bg>
     <p:spTree>
@@ -5684,7 +5496,7 @@
           <a:bodyPr wrap="square" lIns="0" tIns="0" rIns="0" bIns="0" rtlCol="0" anchor="ctr"/>
           <a:lstStyle/>
           <a:p>
-            <a:pPr indent="0" marL="0">
+            <a:pPr marL="0" indent="0">
               <a:buNone/>
             </a:pPr>
             <a:r>
@@ -5704,7 +5516,7 @@
       </p:sp>
       <p:graphicFrame>
         <p:nvGraphicFramePr>
-          <p:cNvPr id="4" name="Chart 0" descr=""/>
+          <p:cNvPr id="4" name="Chart 0"/>
           <p:cNvGraphicFramePr/>
           <p:nvPr/>
         </p:nvGraphicFramePr>
@@ -5712,9 +5524,9 @@
           <a:off x="274320" y="777240"/>
           <a:ext cx="4754880" cy="4114800"/>
         </p:xfrm>
-        <a:graphic xmlns:a="http://schemas.openxmlformats.org/drawingml/2006/main">
+        <a:graphic>
           <a:graphicData uri="http://schemas.openxmlformats.org/drawingml/2006/chart">
-            <c:chart xmlns:c="http://schemas.openxmlformats.org/drawingml/2006/chart" r:id="rId1"/>
+            <c:chart xmlns:c="http://schemas.openxmlformats.org/drawingml/2006/chart" xmlns:r="http://schemas.openxmlformats.org/officeDocument/2006/relationships" r:id="rId3"/>
           </a:graphicData>
         </a:graphic>
       </p:graphicFrame>
@@ -5737,7 +5549,7 @@
           </a:solidFill>
           <a:ln/>
           <a:effectLst>
-            <a:outerShdw sx="100000" sy="100000" kx="0" ky="0" algn="bl" rotWithShape="0" blurRad="101600" dist="38100" dir="8100000">
+            <a:outerShdw blurRad="101600" dist="38100" dir="8100000" algn="bl" rotWithShape="0">
               <a:srgbClr val="000000">
                 <a:alpha val="15000"/>
               </a:srgbClr>
@@ -5786,7 +5598,7 @@
           <a:bodyPr wrap="square" lIns="0" tIns="0" rIns="0" bIns="0" rtlCol="0" anchor="ctr"/>
           <a:lstStyle/>
           <a:p>
-            <a:pPr indent="0" marL="0">
+            <a:pPr marL="0" indent="0">
               <a:buNone/>
             </a:pPr>
             <a:r>
@@ -5825,7 +5637,7 @@
           <a:bodyPr wrap="square" lIns="0" tIns="0" rIns="0" bIns="0" rtlCol="0" anchor="ctr"/>
           <a:lstStyle/>
           <a:p>
-            <a:pPr indent="0" marL="0">
+            <a:pPr marL="0" indent="0">
               <a:buNone/>
             </a:pPr>
             <a:r>
@@ -5864,7 +5676,7 @@
           <a:bodyPr wrap="square" lIns="0" tIns="0" rIns="0" bIns="0" rtlCol="0" anchor="ctr"/>
           <a:lstStyle/>
           <a:p>
-            <a:pPr indent="0" marL="0">
+            <a:pPr marL="0" indent="0">
               <a:buNone/>
             </a:pPr>
             <a:r>
@@ -5901,7 +5713,7 @@
           </a:solidFill>
           <a:ln/>
           <a:effectLst>
-            <a:outerShdw sx="100000" sy="100000" kx="0" ky="0" algn="bl" rotWithShape="0" blurRad="101600" dist="38100" dir="8100000">
+            <a:outerShdw blurRad="101600" dist="38100" dir="8100000" algn="bl" rotWithShape="0">
               <a:srgbClr val="000000">
                 <a:alpha val="15000"/>
               </a:srgbClr>
@@ -5950,7 +5762,7 @@
           <a:bodyPr wrap="square" lIns="0" tIns="0" rIns="0" bIns="0" rtlCol="0" anchor="ctr"/>
           <a:lstStyle/>
           <a:p>
-            <a:pPr indent="0" marL="0">
+            <a:pPr marL="0" indent="0">
               <a:buNone/>
             </a:pPr>
             <a:r>
@@ -5989,7 +5801,7 @@
           <a:bodyPr wrap="square" lIns="0" tIns="0" rIns="0" bIns="0" rtlCol="0" anchor="ctr"/>
           <a:lstStyle/>
           <a:p>
-            <a:pPr indent="0" marL="0">
+            <a:pPr marL="0" indent="0">
               <a:buNone/>
             </a:pPr>
             <a:r>
@@ -6028,7 +5840,7 @@
           <a:bodyPr wrap="square" lIns="0" tIns="0" rIns="0" bIns="0" rtlCol="0" anchor="ctr"/>
           <a:lstStyle/>
           <a:p>
-            <a:pPr indent="0" marL="0">
+            <a:pPr marL="0" indent="0">
               <a:buNone/>
             </a:pPr>
             <a:r>
@@ -6065,7 +5877,7 @@
           </a:solidFill>
           <a:ln/>
           <a:effectLst>
-            <a:outerShdw sx="100000" sy="100000" kx="0" ky="0" algn="bl" rotWithShape="0" blurRad="101600" dist="38100" dir="8100000">
+            <a:outerShdw blurRad="101600" dist="38100" dir="8100000" algn="bl" rotWithShape="0">
               <a:srgbClr val="000000">
                 <a:alpha val="15000"/>
               </a:srgbClr>
@@ -6114,7 +5926,7 @@
           <a:bodyPr wrap="square" lIns="0" tIns="0" rIns="0" bIns="0" rtlCol="0" anchor="ctr"/>
           <a:lstStyle/>
           <a:p>
-            <a:pPr indent="0" marL="0">
+            <a:pPr marL="0" indent="0">
               <a:buNone/>
             </a:pPr>
             <a:r>
@@ -6153,7 +5965,7 @@
           <a:bodyPr wrap="square" lIns="0" tIns="0" rIns="0" bIns="0" rtlCol="0" anchor="ctr"/>
           <a:lstStyle/>
           <a:p>
-            <a:pPr indent="0" marL="0">
+            <a:pPr marL="0" indent="0">
               <a:buNone/>
             </a:pPr>
             <a:r>
@@ -6192,7 +6004,7 @@
           <a:bodyPr wrap="square" lIns="0" tIns="0" rIns="0" bIns="0" rtlCol="0" anchor="ctr"/>
           <a:lstStyle/>
           <a:p>
-            <a:pPr indent="0" marL="0">
+            <a:pPr marL="0" indent="0">
               <a:buNone/>
             </a:pPr>
             <a:r>
@@ -6226,6 +6038,7 @@
         <a:solidFill>
           <a:srgbClr val="F0F4F8"/>
         </a:solidFill>
+        <a:effectLst/>
       </p:bgPr>
     </p:bg>
     <p:spTree>
@@ -6303,7 +6116,7 @@
           <a:bodyPr wrap="square" lIns="0" tIns="0" rIns="0" bIns="0" rtlCol="0" anchor="ctr"/>
           <a:lstStyle/>
           <a:p>
-            <a:pPr indent="0" marL="0">
+            <a:pPr marL="0" indent="0">
               <a:buNone/>
             </a:pPr>
             <a:r>
@@ -6340,7 +6153,7 @@
           </a:solidFill>
           <a:ln/>
           <a:effectLst>
-            <a:outerShdw sx="100000" sy="100000" kx="0" ky="0" algn="bl" rotWithShape="0" blurRad="101600" dist="38100" dir="8100000">
+            <a:outerShdw blurRad="101600" dist="38100" dir="8100000" algn="bl" rotWithShape="0">
               <a:srgbClr val="000000">
                 <a:alpha val="15000"/>
               </a:srgbClr>
@@ -6389,7 +6202,7 @@
           <a:bodyPr wrap="square" lIns="0" tIns="0" rIns="0" bIns="0" rtlCol="0" anchor="ctr"/>
           <a:lstStyle/>
           <a:p>
-            <a:pPr algn="ctr" indent="0" marL="0">
+            <a:pPr marL="0" indent="0" algn="ctr">
               <a:buNone/>
             </a:pPr>
             <a:r>
@@ -6428,7 +6241,7 @@
           <a:bodyPr wrap="square" lIns="0" tIns="0" rIns="0" bIns="0" rtlCol="0" anchor="ctr"/>
           <a:lstStyle/>
           <a:p>
-            <a:pPr algn="ctr" indent="0" marL="0">
+            <a:pPr marL="0" indent="0" algn="ctr">
               <a:buNone/>
             </a:pPr>
             <a:r>
@@ -6583,7 +6396,7 @@
           <a:bodyPr wrap="square" lIns="0" tIns="0" rIns="0" bIns="0" rtlCol="0" anchor="ctr"/>
           <a:lstStyle/>
           <a:p>
-            <a:pPr algn="ctr" indent="0" marL="0">
+            <a:pPr marL="0" indent="0" algn="ctr">
               <a:buNone/>
             </a:pPr>
             <a:r>
@@ -6620,7 +6433,7 @@
           </a:solidFill>
           <a:ln/>
           <a:effectLst>
-            <a:outerShdw sx="100000" sy="100000" kx="0" ky="0" algn="bl" rotWithShape="0" blurRad="101600" dist="38100" dir="8100000">
+            <a:outerShdw blurRad="101600" dist="38100" dir="8100000" algn="bl" rotWithShape="0">
               <a:srgbClr val="000000">
                 <a:alpha val="15000"/>
               </a:srgbClr>
@@ -6669,7 +6482,7 @@
           <a:bodyPr wrap="square" lIns="0" tIns="0" rIns="0" bIns="0" rtlCol="0" anchor="ctr"/>
           <a:lstStyle/>
           <a:p>
-            <a:pPr algn="ctr" indent="0" marL="0">
+            <a:pPr marL="0" indent="0" algn="ctr">
               <a:buNone/>
             </a:pPr>
             <a:r>
@@ -6708,7 +6521,7 @@
           <a:bodyPr wrap="square" lIns="0" tIns="0" rIns="0" bIns="0" rtlCol="0" anchor="ctr"/>
           <a:lstStyle/>
           <a:p>
-            <a:pPr algn="ctr" indent="0" marL="0">
+            <a:pPr marL="0" indent="0" algn="ctr">
               <a:buNone/>
             </a:pPr>
             <a:r>
@@ -6881,7 +6694,7 @@
           <a:bodyPr wrap="square" lIns="0" tIns="0" rIns="0" bIns="0" rtlCol="0" anchor="ctr"/>
           <a:lstStyle/>
           <a:p>
-            <a:pPr algn="ctr" indent="0" marL="0">
+            <a:pPr marL="0" indent="0" algn="ctr">
               <a:buNone/>
             </a:pPr>
             <a:r>
@@ -6918,7 +6731,7 @@
           </a:solidFill>
           <a:ln/>
           <a:effectLst>
-            <a:outerShdw sx="100000" sy="100000" kx="0" ky="0" algn="bl" rotWithShape="0" blurRad="101600" dist="38100" dir="8100000">
+            <a:outerShdw blurRad="101600" dist="38100" dir="8100000" algn="bl" rotWithShape="0">
               <a:srgbClr val="000000">
                 <a:alpha val="15000"/>
               </a:srgbClr>
@@ -6967,7 +6780,7 @@
           <a:bodyPr wrap="square" lIns="0" tIns="0" rIns="0" bIns="0" rtlCol="0" anchor="ctr"/>
           <a:lstStyle/>
           <a:p>
-            <a:pPr algn="ctr" indent="0" marL="0">
+            <a:pPr marL="0" indent="0" algn="ctr">
               <a:buNone/>
             </a:pPr>
             <a:r>
@@ -7006,7 +6819,7 @@
           <a:bodyPr wrap="square" lIns="0" tIns="0" rIns="0" bIns="0" rtlCol="0" anchor="ctr"/>
           <a:lstStyle/>
           <a:p>
-            <a:pPr algn="ctr" indent="0" marL="0">
+            <a:pPr marL="0" indent="0" algn="ctr">
               <a:buNone/>
             </a:pPr>
             <a:r>
@@ -7179,7 +6992,7 @@
           <a:bodyPr wrap="square" lIns="0" tIns="0" rIns="0" bIns="0" rtlCol="0" anchor="ctr"/>
           <a:lstStyle/>
           <a:p>
-            <a:pPr algn="ctr" indent="0" marL="0">
+            <a:pPr marL="0" indent="0" algn="ctr">
               <a:buNone/>
             </a:pPr>
             <a:r>
@@ -7216,7 +7029,7 @@
           </a:solidFill>
           <a:ln/>
           <a:effectLst>
-            <a:outerShdw sx="100000" sy="100000" kx="0" ky="0" algn="bl" rotWithShape="0" blurRad="101600" dist="38100" dir="8100000">
+            <a:outerShdw blurRad="101600" dist="38100" dir="8100000" algn="bl" rotWithShape="0">
               <a:srgbClr val="000000">
                 <a:alpha val="15000"/>
               </a:srgbClr>
@@ -7265,7 +7078,7 @@
           <a:bodyPr wrap="square" lIns="0" tIns="0" rIns="0" bIns="0" rtlCol="0" anchor="ctr"/>
           <a:lstStyle/>
           <a:p>
-            <a:pPr algn="ctr" indent="0" marL="0">
+            <a:pPr marL="0" indent="0" algn="ctr">
               <a:buNone/>
             </a:pPr>
             <a:r>
@@ -7304,7 +7117,7 @@
           <a:bodyPr wrap="square" lIns="0" tIns="0" rIns="0" bIns="0" rtlCol="0" anchor="ctr"/>
           <a:lstStyle/>
           <a:p>
-            <a:pPr algn="ctr" indent="0" marL="0">
+            <a:pPr marL="0" indent="0" algn="ctr">
               <a:buNone/>
             </a:pPr>
             <a:r>
@@ -7477,7 +7290,7 @@
           <a:bodyPr wrap="square" lIns="0" tIns="0" rIns="0" bIns="0" rtlCol="0" anchor="ctr"/>
           <a:lstStyle/>
           <a:p>
-            <a:pPr algn="ctr" indent="0" marL="0">
+            <a:pPr marL="0" indent="0" algn="ctr">
               <a:buNone/>
             </a:pPr>
             <a:r>
@@ -7514,7 +7327,7 @@
           </a:solidFill>
           <a:ln/>
           <a:effectLst>
-            <a:outerShdw sx="100000" sy="100000" kx="0" ky="0" algn="bl" rotWithShape="0" blurRad="101600" dist="38100" dir="8100000">
+            <a:outerShdw blurRad="101600" dist="38100" dir="8100000" algn="bl" rotWithShape="0">
               <a:srgbClr val="000000">
                 <a:alpha val="15000"/>
               </a:srgbClr>
@@ -7563,7 +7376,7 @@
           <a:bodyPr wrap="square" lIns="0" tIns="0" rIns="0" bIns="0" rtlCol="0" anchor="ctr"/>
           <a:lstStyle/>
           <a:p>
-            <a:pPr algn="ctr" indent="0" marL="0">
+            <a:pPr marL="0" indent="0" algn="ctr">
               <a:buNone/>
             </a:pPr>
             <a:r>
@@ -7602,7 +7415,7 @@
           <a:bodyPr wrap="square" lIns="0" tIns="0" rIns="0" bIns="0" rtlCol="0" anchor="ctr"/>
           <a:lstStyle/>
           <a:p>
-            <a:pPr algn="ctr" indent="0" marL="0">
+            <a:pPr marL="0" indent="0" algn="ctr">
               <a:buNone/>
             </a:pPr>
             <a:r>
@@ -7775,7 +7588,7 @@
           <a:bodyPr wrap="square" lIns="0" tIns="0" rIns="0" bIns="0" rtlCol="0" anchor="ctr"/>
           <a:lstStyle/>
           <a:p>
-            <a:pPr algn="ctr" indent="0" marL="0">
+            <a:pPr marL="0" indent="0" algn="ctr">
               <a:buNone/>
             </a:pPr>
             <a:r>
@@ -7834,7 +7647,7 @@
           <a:bodyPr wrap="square" lIns="0" tIns="0" rIns="0" bIns="0" rtlCol="0" anchor="ctr"/>
           <a:lstStyle/>
           <a:p>
-            <a:pPr algn="r" indent="0" marL="0">
+            <a:pPr marL="0" indent="0" algn="r">
               <a:buNone/>
             </a:pPr>
             <a:r>
@@ -7868,6 +7681,7 @@
         <a:solidFill>
           <a:srgbClr val="F0F4F8"/>
         </a:solidFill>
+        <a:effectLst/>
       </p:bgPr>
     </p:bg>
     <p:spTree>
@@ -7925,7 +7739,7 @@
           <a:bodyPr wrap="square" lIns="0" tIns="0" rIns="0" bIns="0" rtlCol="0" anchor="ctr"/>
           <a:lstStyle/>
           <a:p>
-            <a:pPr indent="0" marL="0">
+            <a:pPr marL="0" indent="0">
               <a:buNone/>
             </a:pPr>
             <a:r>
@@ -7964,11 +7778,11 @@
           <a:bodyPr wrap="square" lIns="0" tIns="0" rIns="0" bIns="0" rtlCol="0" anchor="ctr"/>
           <a:lstStyle/>
           <a:p>
-            <a:pPr indent="0" marL="0">
-              <a:buNone/>
-            </a:pPr>
-            <a:r>
-              <a:rPr lang="en-US" sz="1600" b="1" spc="200" kern="0" dirty="0">
+            <a:pPr marL="0" indent="0">
+              <a:buNone/>
+            </a:pPr>
+            <a:r>
+              <a:rPr lang="en-US" sz="1600" b="1" kern="0" spc="200" dirty="0">
                 <a:solidFill>
                   <a:srgbClr val="FFFFFF"/>
                 </a:solidFill>
@@ -8003,7 +7817,7 @@
           <a:bodyPr wrap="square" lIns="0" tIns="0" rIns="0" bIns="0" rtlCol="0" anchor="ctr"/>
           <a:lstStyle/>
           <a:p>
-            <a:pPr algn="r" indent="0" marL="0">
+            <a:pPr marL="0" indent="0" algn="r">
               <a:buNone/>
             </a:pPr>
             <a:r>
@@ -8040,7 +7854,7 @@
           </a:solidFill>
           <a:ln/>
           <a:effectLst>
-            <a:outerShdw sx="100000" sy="100000" kx="0" ky="0" algn="bl" rotWithShape="0" blurRad="101600" dist="38100" dir="8100000">
+            <a:outerShdw blurRad="101600" dist="38100" dir="8100000" algn="bl" rotWithShape="0">
               <a:srgbClr val="000000">
                 <a:alpha val="15000"/>
               </a:srgbClr>
@@ -8109,7 +7923,7 @@
           <a:bodyPr wrap="square" lIns="0" tIns="0" rIns="0" bIns="0" rtlCol="0" anchor="ctr"/>
           <a:lstStyle/>
           <a:p>
-            <a:pPr algn="ctr" indent="0" marL="0">
+            <a:pPr marL="0" indent="0" algn="ctr">
               <a:buNone/>
             </a:pPr>
             <a:r>
@@ -8148,7 +7962,7 @@
           <a:bodyPr wrap="square" lIns="0" tIns="0" rIns="0" bIns="0" rtlCol="0" anchor="ctr"/>
           <a:lstStyle/>
           <a:p>
-            <a:pPr indent="0" marL="0">
+            <a:pPr marL="0" indent="0">
               <a:buNone/>
             </a:pPr>
             <a:r>
@@ -8187,7 +8001,7 @@
           <a:bodyPr wrap="square" rtlCol="0" anchor="ctr"/>
           <a:lstStyle/>
           <a:p>
-            <a:pPr indent="0" marL="0">
+            <a:pPr marL="0" indent="0">
               <a:buNone/>
             </a:pPr>
             <a:r>
@@ -8224,7 +8038,7 @@
           </a:solidFill>
           <a:ln/>
           <a:effectLst>
-            <a:outerShdw sx="100000" sy="100000" kx="0" ky="0" algn="bl" rotWithShape="0" blurRad="101600" dist="38100" dir="8100000">
+            <a:outerShdw blurRad="101600" dist="38100" dir="8100000" algn="bl" rotWithShape="0">
               <a:srgbClr val="000000">
                 <a:alpha val="15000"/>
               </a:srgbClr>
@@ -8293,7 +8107,7 @@
           <a:bodyPr wrap="square" lIns="0" tIns="0" rIns="0" bIns="0" rtlCol="0" anchor="ctr"/>
           <a:lstStyle/>
           <a:p>
-            <a:pPr algn="ctr" indent="0" marL="0">
+            <a:pPr marL="0" indent="0" algn="ctr">
               <a:buNone/>
             </a:pPr>
             <a:r>
@@ -8332,7 +8146,7 @@
           <a:bodyPr wrap="square" lIns="0" tIns="0" rIns="0" bIns="0" rtlCol="0" anchor="ctr"/>
           <a:lstStyle/>
           <a:p>
-            <a:pPr indent="0" marL="0">
+            <a:pPr marL="0" indent="0">
               <a:buNone/>
             </a:pPr>
             <a:r>
@@ -8371,7 +8185,7 @@
           <a:bodyPr wrap="square" rtlCol="0" anchor="ctr"/>
           <a:lstStyle/>
           <a:p>
-            <a:pPr indent="0" marL="0">
+            <a:pPr marL="0" indent="0">
               <a:buNone/>
             </a:pPr>
             <a:r>
@@ -8408,7 +8222,7 @@
           </a:solidFill>
           <a:ln/>
           <a:effectLst>
-            <a:outerShdw sx="100000" sy="100000" kx="0" ky="0" algn="bl" rotWithShape="0" blurRad="101600" dist="38100" dir="8100000">
+            <a:outerShdw blurRad="101600" dist="38100" dir="8100000" algn="bl" rotWithShape="0">
               <a:srgbClr val="000000">
                 <a:alpha val="15000"/>
               </a:srgbClr>
@@ -8477,7 +8291,7 @@
           <a:bodyPr wrap="square" lIns="0" tIns="0" rIns="0" bIns="0" rtlCol="0" anchor="ctr"/>
           <a:lstStyle/>
           <a:p>
-            <a:pPr algn="ctr" indent="0" marL="0">
+            <a:pPr marL="0" indent="0" algn="ctr">
               <a:buNone/>
             </a:pPr>
             <a:r>
@@ -8516,7 +8330,7 @@
           <a:bodyPr wrap="square" lIns="0" tIns="0" rIns="0" bIns="0" rtlCol="0" anchor="ctr"/>
           <a:lstStyle/>
           <a:p>
-            <a:pPr indent="0" marL="0">
+            <a:pPr marL="0" indent="0">
               <a:buNone/>
             </a:pPr>
             <a:r>
@@ -8555,7 +8369,7 @@
           <a:bodyPr wrap="square" rtlCol="0" anchor="ctr"/>
           <a:lstStyle/>
           <a:p>
-            <a:pPr indent="0" marL="0">
+            <a:pPr marL="0" indent="0">
               <a:buNone/>
             </a:pPr>
             <a:r>
@@ -8592,7 +8406,7 @@
           </a:solidFill>
           <a:ln/>
           <a:effectLst>
-            <a:outerShdw sx="100000" sy="100000" kx="0" ky="0" algn="bl" rotWithShape="0" blurRad="101600" dist="38100" dir="8100000">
+            <a:outerShdw blurRad="101600" dist="38100" dir="8100000" algn="bl" rotWithShape="0">
               <a:srgbClr val="000000">
                 <a:alpha val="15000"/>
               </a:srgbClr>
@@ -8661,7 +8475,7 @@
           <a:bodyPr wrap="square" lIns="0" tIns="0" rIns="0" bIns="0" rtlCol="0" anchor="ctr"/>
           <a:lstStyle/>
           <a:p>
-            <a:pPr algn="ctr" indent="0" marL="0">
+            <a:pPr marL="0" indent="0" algn="ctr">
               <a:buNone/>
             </a:pPr>
             <a:r>
@@ -8700,7 +8514,7 @@
           <a:bodyPr wrap="square" lIns="0" tIns="0" rIns="0" bIns="0" rtlCol="0" anchor="ctr"/>
           <a:lstStyle/>
           <a:p>
-            <a:pPr indent="0" marL="0">
+            <a:pPr marL="0" indent="0">
               <a:buNone/>
             </a:pPr>
             <a:r>
@@ -8739,7 +8553,7 @@
           <a:bodyPr wrap="square" rtlCol="0" anchor="ctr"/>
           <a:lstStyle/>
           <a:p>
-            <a:pPr indent="0" marL="0">
+            <a:pPr marL="0" indent="0">
               <a:buNone/>
             </a:pPr>
             <a:r>
@@ -8798,7 +8612,7 @@
           <a:bodyPr wrap="square" lIns="0" tIns="0" rIns="0" bIns="0" rtlCol="0" anchor="ctr"/>
           <a:lstStyle/>
           <a:p>
-            <a:pPr indent="0" marL="0">
+            <a:pPr marL="0" indent="0">
               <a:buNone/>
             </a:pPr>
             <a:r>
@@ -8832,6 +8646,7 @@
         <a:solidFill>
           <a:srgbClr val="F0F4F8"/>
         </a:solidFill>
+        <a:effectLst/>
       </p:bgPr>
     </p:bg>
     <p:spTree>
@@ -8889,7 +8704,7 @@
           <a:bodyPr wrap="square" lIns="0" tIns="0" rIns="0" bIns="0" rtlCol="0" anchor="ctr"/>
           <a:lstStyle/>
           <a:p>
-            <a:pPr indent="0" marL="0">
+            <a:pPr marL="0" indent="0">
               <a:buNone/>
             </a:pPr>
             <a:r>
@@ -8928,11 +8743,11 @@
           <a:bodyPr wrap="square" lIns="0" tIns="0" rIns="0" bIns="0" rtlCol="0" anchor="ctr"/>
           <a:lstStyle/>
           <a:p>
-            <a:pPr indent="0" marL="0">
-              <a:buNone/>
-            </a:pPr>
-            <a:r>
-              <a:rPr lang="en-US" sz="1600" b="1" spc="200" kern="0" dirty="0">
+            <a:pPr marL="0" indent="0">
+              <a:buNone/>
+            </a:pPr>
+            <a:r>
+              <a:rPr lang="en-US" sz="1600" b="1" kern="0" spc="200" dirty="0">
                 <a:solidFill>
                   <a:srgbClr val="FFFFFF"/>
                 </a:solidFill>
@@ -8967,7 +8782,7 @@
           <a:bodyPr wrap="square" lIns="0" tIns="0" rIns="0" bIns="0" rtlCol="0" anchor="ctr"/>
           <a:lstStyle/>
           <a:p>
-            <a:pPr algn="r" indent="0" marL="0">
+            <a:pPr marL="0" indent="0" algn="r">
               <a:buNone/>
             </a:pPr>
             <a:r>
@@ -9004,7 +8819,7 @@
           </a:solidFill>
           <a:ln/>
           <a:effectLst>
-            <a:outerShdw sx="100000" sy="100000" kx="0" ky="0" algn="bl" rotWithShape="0" blurRad="101600" dist="38100" dir="8100000">
+            <a:outerShdw blurRad="101600" dist="38100" dir="8100000" algn="bl" rotWithShape="0">
               <a:srgbClr val="000000">
                 <a:alpha val="15000"/>
               </a:srgbClr>
@@ -9053,7 +8868,7 @@
           <a:bodyPr wrap="square" lIns="0" tIns="0" rIns="0" bIns="0" rtlCol="0" anchor="ctr"/>
           <a:lstStyle/>
           <a:p>
-            <a:pPr indent="0" marL="0">
+            <a:pPr marL="0" indent="0">
               <a:buNone/>
             </a:pPr>
             <a:r>
@@ -9202,7 +9017,7 @@
           </a:solidFill>
           <a:ln/>
           <a:effectLst>
-            <a:outerShdw sx="100000" sy="100000" kx="0" ky="0" algn="bl" rotWithShape="0" blurRad="101600" dist="38100" dir="8100000">
+            <a:outerShdw blurRad="101600" dist="38100" dir="8100000" algn="bl" rotWithShape="0">
               <a:srgbClr val="000000">
                 <a:alpha val="15000"/>
               </a:srgbClr>
@@ -9231,7 +9046,7 @@
           <a:bodyPr wrap="square" lIns="0" tIns="0" rIns="0" bIns="0" rtlCol="0" anchor="ctr"/>
           <a:lstStyle/>
           <a:p>
-            <a:pPr indent="0" marL="0">
+            <a:pPr marL="0" indent="0">
               <a:buNone/>
             </a:pPr>
             <a:r>
@@ -9270,7 +9085,7 @@
           <a:bodyPr wrap="square" rtlCol="0" anchor="ctr"/>
           <a:lstStyle/>
           <a:p>
-            <a:pPr indent="0" marL="0">
+            <a:pPr marL="0" indent="0">
               <a:buNone/>
             </a:pPr>
             <a:r>
@@ -9307,7 +9122,7 @@
           </a:solidFill>
           <a:ln/>
           <a:effectLst>
-            <a:outerShdw sx="100000" sy="100000" kx="0" ky="0" algn="bl" rotWithShape="0" blurRad="101600" dist="38100" dir="8100000">
+            <a:outerShdw blurRad="101600" dist="38100" dir="8100000" algn="bl" rotWithShape="0">
               <a:srgbClr val="000000">
                 <a:alpha val="15000"/>
               </a:srgbClr>
@@ -9356,7 +9171,7 @@
           <a:bodyPr wrap="square" lIns="0" tIns="0" rIns="0" bIns="0" rtlCol="0" anchor="ctr"/>
           <a:lstStyle/>
           <a:p>
-            <a:pPr indent="0" marL="0">
+            <a:pPr marL="0" indent="0">
               <a:buNone/>
             </a:pPr>
             <a:r>
@@ -9509,7 +9324,7 @@
           <a:bodyPr wrap="square" lIns="0" tIns="0" rIns="0" bIns="0" rtlCol="0" anchor="ctr"/>
           <a:lstStyle/>
           <a:p>
-            <a:pPr indent="0" marL="0">
+            <a:pPr marL="0" indent="0">
               <a:buNone/>
             </a:pPr>
             <a:r>
@@ -9543,6 +9358,7 @@
         <a:solidFill>
           <a:srgbClr val="F0F4F8"/>
         </a:solidFill>
+        <a:effectLst/>
       </p:bgPr>
     </p:bg>
     <p:spTree>
@@ -9620,7 +9436,7 @@
           <a:bodyPr wrap="square" lIns="0" tIns="0" rIns="0" bIns="0" rtlCol="0" anchor="ctr"/>
           <a:lstStyle/>
           <a:p>
-            <a:pPr indent="0" marL="0">
+            <a:pPr marL="0" indent="0">
               <a:buNone/>
             </a:pPr>
             <a:r>
@@ -9657,7 +9473,7 @@
           </a:solidFill>
           <a:ln/>
           <a:effectLst>
-            <a:outerShdw sx="100000" sy="100000" kx="0" ky="0" algn="bl" rotWithShape="0" blurRad="101600" dist="38100" dir="8100000">
+            <a:outerShdw blurRad="101600" dist="38100" dir="8100000" algn="bl" rotWithShape="0">
               <a:srgbClr val="000000">
                 <a:alpha val="15000"/>
               </a:srgbClr>
@@ -9706,7 +9522,7 @@
           <a:bodyPr wrap="square" lIns="0" tIns="0" rIns="0" bIns="0" rtlCol="0" anchor="ctr"/>
           <a:lstStyle/>
           <a:p>
-            <a:pPr indent="0" marL="0">
+            <a:pPr marL="0" indent="0">
               <a:buNone/>
             </a:pPr>
             <a:r>
@@ -9745,7 +9561,7 @@
           <a:bodyPr wrap="square" lIns="0" tIns="0" rIns="0" bIns="0" rtlCol="0" anchor="ctr"/>
           <a:lstStyle/>
           <a:p>
-            <a:pPr algn="r" indent="0" marL="0">
+            <a:pPr marL="0" indent="0" algn="r">
               <a:buNone/>
             </a:pPr>
             <a:r>
@@ -9784,7 +9600,7 @@
           <a:bodyPr wrap="square" rtlCol="0" anchor="ctr"/>
           <a:lstStyle/>
           <a:p>
-            <a:pPr indent="0" marL="0">
+            <a:pPr marL="0" indent="0">
               <a:buNone/>
             </a:pPr>
             <a:r>
@@ -9915,7 +9731,7 @@
           </a:solidFill>
           <a:ln/>
           <a:effectLst>
-            <a:outerShdw sx="100000" sy="100000" kx="0" ky="0" algn="bl" rotWithShape="0" blurRad="101600" dist="38100" dir="8100000">
+            <a:outerShdw blurRad="101600" dist="38100" dir="8100000" algn="bl" rotWithShape="0">
               <a:srgbClr val="000000">
                 <a:alpha val="15000"/>
               </a:srgbClr>
@@ -9964,7 +9780,7 @@
           <a:bodyPr wrap="square" lIns="0" tIns="0" rIns="0" bIns="0" rtlCol="0" anchor="ctr"/>
           <a:lstStyle/>
           <a:p>
-            <a:pPr indent="0" marL="0">
+            <a:pPr marL="0" indent="0">
               <a:buNone/>
             </a:pPr>
             <a:r>
@@ -10003,7 +9819,7 @@
           <a:bodyPr wrap="square" lIns="0" tIns="0" rIns="0" bIns="0" rtlCol="0" anchor="ctr"/>
           <a:lstStyle/>
           <a:p>
-            <a:pPr algn="r" indent="0" marL="0">
+            <a:pPr marL="0" indent="0" algn="r">
               <a:buNone/>
             </a:pPr>
             <a:r>
@@ -10042,7 +9858,7 @@
           <a:bodyPr wrap="square" rtlCol="0" anchor="ctr"/>
           <a:lstStyle/>
           <a:p>
-            <a:pPr indent="0" marL="0">
+            <a:pPr marL="0" indent="0">
               <a:buNone/>
             </a:pPr>
             <a:r>
@@ -10191,7 +10007,7 @@
           </a:solidFill>
           <a:ln/>
           <a:effectLst>
-            <a:outerShdw sx="100000" sy="100000" kx="0" ky="0" algn="bl" rotWithShape="0" blurRad="101600" dist="38100" dir="8100000">
+            <a:outerShdw blurRad="101600" dist="38100" dir="8100000" algn="bl" rotWithShape="0">
               <a:srgbClr val="000000">
                 <a:alpha val="15000"/>
               </a:srgbClr>
@@ -10240,7 +10056,7 @@
           <a:bodyPr wrap="square" lIns="0" tIns="0" rIns="0" bIns="0" rtlCol="0" anchor="ctr"/>
           <a:lstStyle/>
           <a:p>
-            <a:pPr indent="0" marL="0">
+            <a:pPr marL="0" indent="0">
               <a:buNone/>
             </a:pPr>
             <a:r>
@@ -10279,7 +10095,7 @@
           <a:bodyPr wrap="square" lIns="0" tIns="0" rIns="0" bIns="0" rtlCol="0" anchor="ctr"/>
           <a:lstStyle/>
           <a:p>
-            <a:pPr algn="r" indent="0" marL="0">
+            <a:pPr marL="0" indent="0" algn="r">
               <a:buNone/>
             </a:pPr>
             <a:r>
@@ -10296,7 +10112,7 @@
             <a:endParaRPr lang="en-US" sz="1100" dirty="0"/>
           </a:p>
           <a:p>
-            <a:pPr algn="r" indent="0" marL="0">
+            <a:pPr marL="0" indent="0" algn="r">
               <a:buNone/>
             </a:pPr>
             <a:r>
@@ -10335,7 +10151,7 @@
           <a:bodyPr wrap="square" rtlCol="0" anchor="ctr"/>
           <a:lstStyle/>
           <a:p>
-            <a:pPr indent="0" marL="0">
+            <a:pPr marL="0" indent="0">
               <a:buNone/>
             </a:pPr>
             <a:r>
@@ -10506,7 +10322,7 @@
           <a:bodyPr wrap="square" lIns="0" tIns="0" rIns="0" bIns="0" rtlCol="0" anchor="ctr"/>
           <a:lstStyle/>
           <a:p>
-            <a:pPr indent="0" marL="0">
+            <a:pPr marL="0" indent="0">
               <a:buNone/>
             </a:pPr>
             <a:r>
@@ -10540,6 +10356,7 @@
         <a:solidFill>
           <a:srgbClr val="0D1B3E"/>
         </a:solidFill>
+        <a:effectLst/>
       </p:bgPr>
     </p:bg>
     <p:spTree>
@@ -10597,7 +10414,7 @@
           <a:bodyPr wrap="square" lIns="0" tIns="0" rIns="0" bIns="0" rtlCol="0" anchor="ctr"/>
           <a:lstStyle/>
           <a:p>
-            <a:pPr indent="0" marL="0">
+            <a:pPr marL="0" indent="0">
               <a:buNone/>
             </a:pPr>
             <a:r>
@@ -10676,7 +10493,7 @@
           <a:bodyPr wrap="square" rtlCol="0" anchor="ctr"/>
           <a:lstStyle/>
           <a:p>
-            <a:pPr indent="0" marL="0">
+            <a:pPr marL="0" indent="0">
               <a:buNone/>
             </a:pPr>
             <a:r>
@@ -10715,7 +10532,7 @@
           <a:bodyPr wrap="square" lIns="0" tIns="0" rIns="0" bIns="0" rtlCol="0" anchor="ctr"/>
           <a:lstStyle/>
           <a:p>
-            <a:pPr algn="r" indent="0" marL="0">
+            <a:pPr marL="0" indent="0" algn="r">
               <a:buNone/>
             </a:pPr>
             <a:r>
@@ -10752,7 +10569,7 @@
           </a:solidFill>
           <a:ln/>
           <a:effectLst>
-            <a:outerShdw sx="100000" sy="100000" kx="0" ky="0" algn="bl" rotWithShape="0" blurRad="101600" dist="38100" dir="8100000">
+            <a:outerShdw blurRad="101600" dist="38100" dir="8100000" algn="bl" rotWithShape="0">
               <a:srgbClr val="000000">
                 <a:alpha val="15000"/>
               </a:srgbClr>
@@ -10801,7 +10618,7 @@
           <a:bodyPr wrap="square" lIns="0" tIns="0" rIns="0" bIns="0" rtlCol="0" anchor="ctr"/>
           <a:lstStyle/>
           <a:p>
-            <a:pPr algn="ctr" indent="0" marL="0">
+            <a:pPr marL="0" indent="0" algn="ctr">
               <a:buNone/>
             </a:pPr>
             <a:r>
@@ -10837,7 +10654,7 @@
           <a:bodyPr wrap="square" lIns="0" tIns="0" rIns="0" bIns="0" rtlCol="0" anchor="ctr"/>
           <a:lstStyle/>
           <a:p>
-            <a:pPr algn="ctr" indent="0" marL="0">
+            <a:pPr marL="0" indent="0" algn="ctr">
               <a:buNone/>
             </a:pPr>
             <a:r>
@@ -10876,7 +10693,7 @@
           <a:bodyPr wrap="square" rtlCol="0" anchor="ctr"/>
           <a:lstStyle/>
           <a:p>
-            <a:pPr indent="0" marL="0">
+            <a:pPr marL="0" indent="0">
               <a:buNone/>
             </a:pPr>
             <a:r>
@@ -10913,7 +10730,7 @@
           </a:solidFill>
           <a:ln/>
           <a:effectLst>
-            <a:outerShdw sx="100000" sy="100000" kx="0" ky="0" algn="bl" rotWithShape="0" blurRad="101600" dist="38100" dir="8100000">
+            <a:outerShdw blurRad="101600" dist="38100" dir="8100000" algn="bl" rotWithShape="0">
               <a:srgbClr val="000000">
                 <a:alpha val="15000"/>
               </a:srgbClr>
@@ -10962,7 +10779,7 @@
           <a:bodyPr wrap="square" lIns="0" tIns="0" rIns="0" bIns="0" rtlCol="0" anchor="ctr"/>
           <a:lstStyle/>
           <a:p>
-            <a:pPr algn="ctr" indent="0" marL="0">
+            <a:pPr marL="0" indent="0" algn="ctr">
               <a:buNone/>
             </a:pPr>
             <a:r>
@@ -10998,7 +10815,7 @@
           <a:bodyPr wrap="square" lIns="0" tIns="0" rIns="0" bIns="0" rtlCol="0" anchor="ctr"/>
           <a:lstStyle/>
           <a:p>
-            <a:pPr algn="ctr" indent="0" marL="0">
+            <a:pPr marL="0" indent="0" algn="ctr">
               <a:buNone/>
             </a:pPr>
             <a:r>
@@ -11037,7 +10854,7 @@
           <a:bodyPr wrap="square" rtlCol="0" anchor="ctr"/>
           <a:lstStyle/>
           <a:p>
-            <a:pPr indent="0" marL="0">
+            <a:pPr marL="0" indent="0">
               <a:buNone/>
             </a:pPr>
             <a:r>
@@ -11074,7 +10891,7 @@
           </a:solidFill>
           <a:ln/>
           <a:effectLst>
-            <a:outerShdw sx="100000" sy="100000" kx="0" ky="0" algn="bl" rotWithShape="0" blurRad="101600" dist="38100" dir="8100000">
+            <a:outerShdw blurRad="101600" dist="38100" dir="8100000" algn="bl" rotWithShape="0">
               <a:srgbClr val="000000">
                 <a:alpha val="15000"/>
               </a:srgbClr>
@@ -11123,7 +10940,7 @@
           <a:bodyPr wrap="square" lIns="0" tIns="0" rIns="0" bIns="0" rtlCol="0" anchor="ctr"/>
           <a:lstStyle/>
           <a:p>
-            <a:pPr algn="ctr" indent="0" marL="0">
+            <a:pPr marL="0" indent="0" algn="ctr">
               <a:buNone/>
             </a:pPr>
             <a:r>
@@ -11159,7 +10976,7 @@
           <a:bodyPr wrap="square" lIns="0" tIns="0" rIns="0" bIns="0" rtlCol="0" anchor="ctr"/>
           <a:lstStyle/>
           <a:p>
-            <a:pPr algn="ctr" indent="0" marL="0">
+            <a:pPr marL="0" indent="0" algn="ctr">
               <a:buNone/>
             </a:pPr>
             <a:r>
@@ -11198,7 +11015,7 @@
           <a:bodyPr wrap="square" rtlCol="0" anchor="ctr"/>
           <a:lstStyle/>
           <a:p>
-            <a:pPr indent="0" marL="0">
+            <a:pPr marL="0" indent="0">
               <a:buNone/>
             </a:pPr>
             <a:r>
@@ -11257,7 +11074,7 @@
           <a:bodyPr wrap="square" lIns="0" tIns="0" rIns="0" bIns="0" rtlCol="0" anchor="ctr"/>
           <a:lstStyle/>
           <a:p>
-            <a:pPr indent="0" marL="0">
+            <a:pPr marL="0" indent="0">
               <a:buNone/>
             </a:pPr>
             <a:r>
@@ -11291,6 +11108,7 @@
         <a:solidFill>
           <a:srgbClr val="F0F4F8"/>
         </a:solidFill>
+        <a:effectLst/>
       </p:bgPr>
     </p:bg>
     <p:spTree>
@@ -11368,7 +11186,7 @@
           <a:bodyPr wrap="square" lIns="0" tIns="0" rIns="0" bIns="0" rtlCol="0" anchor="ctr"/>
           <a:lstStyle/>
           <a:p>
-            <a:pPr indent="0" marL="0">
+            <a:pPr marL="0" indent="0">
               <a:buNone/>
             </a:pPr>
             <a:r>
@@ -11405,7 +11223,7 @@
           </a:solidFill>
           <a:ln/>
           <a:effectLst>
-            <a:outerShdw sx="100000" sy="100000" kx="0" ky="0" algn="bl" rotWithShape="0" blurRad="101600" dist="38100" dir="8100000">
+            <a:outerShdw blurRad="101600" dist="38100" dir="8100000" algn="bl" rotWithShape="0">
               <a:srgbClr val="000000">
                 <a:alpha val="15000"/>
               </a:srgbClr>
@@ -11474,7 +11292,7 @@
           <a:bodyPr wrap="square" lIns="0" tIns="0" rIns="0" bIns="0" rtlCol="0" anchor="ctr"/>
           <a:lstStyle/>
           <a:p>
-            <a:pPr algn="ctr" indent="0" marL="0">
+            <a:pPr marL="0" indent="0" algn="ctr">
               <a:buNone/>
             </a:pPr>
             <a:r>
@@ -11513,7 +11331,7 @@
           <a:bodyPr wrap="square" lIns="0" tIns="0" rIns="0" bIns="0" rtlCol="0" anchor="ctr"/>
           <a:lstStyle/>
           <a:p>
-            <a:pPr indent="0" marL="0">
+            <a:pPr marL="0" indent="0">
               <a:buNone/>
             </a:pPr>
             <a:r>
@@ -11552,7 +11370,7 @@
           <a:bodyPr wrap="square" rtlCol="0" anchor="ctr"/>
           <a:lstStyle/>
           <a:p>
-            <a:pPr indent="0" marL="0">
+            <a:pPr marL="0" indent="0">
               <a:buNone/>
             </a:pPr>
             <a:r>
@@ -11589,7 +11407,7 @@
           </a:solidFill>
           <a:ln/>
           <a:effectLst>
-            <a:outerShdw sx="100000" sy="100000" kx="0" ky="0" algn="bl" rotWithShape="0" blurRad="101600" dist="38100" dir="8100000">
+            <a:outerShdw blurRad="101600" dist="38100" dir="8100000" algn="bl" rotWithShape="0">
               <a:srgbClr val="000000">
                 <a:alpha val="15000"/>
               </a:srgbClr>
@@ -11658,7 +11476,7 @@
           <a:bodyPr wrap="square" lIns="0" tIns="0" rIns="0" bIns="0" rtlCol="0" anchor="ctr"/>
           <a:lstStyle/>
           <a:p>
-            <a:pPr algn="ctr" indent="0" marL="0">
+            <a:pPr marL="0" indent="0" algn="ctr">
               <a:buNone/>
             </a:pPr>
             <a:r>
@@ -11697,7 +11515,7 @@
           <a:bodyPr wrap="square" lIns="0" tIns="0" rIns="0" bIns="0" rtlCol="0" anchor="ctr"/>
           <a:lstStyle/>
           <a:p>
-            <a:pPr indent="0" marL="0">
+            <a:pPr marL="0" indent="0">
               <a:buNone/>
             </a:pPr>
             <a:r>
@@ -11736,7 +11554,7 @@
           <a:bodyPr wrap="square" rtlCol="0" anchor="ctr"/>
           <a:lstStyle/>
           <a:p>
-            <a:pPr indent="0" marL="0">
+            <a:pPr marL="0" indent="0">
               <a:buNone/>
             </a:pPr>
             <a:r>
@@ -11773,7 +11591,7 @@
           </a:solidFill>
           <a:ln/>
           <a:effectLst>
-            <a:outerShdw sx="100000" sy="100000" kx="0" ky="0" algn="bl" rotWithShape="0" blurRad="101600" dist="38100" dir="8100000">
+            <a:outerShdw blurRad="101600" dist="38100" dir="8100000" algn="bl" rotWithShape="0">
               <a:srgbClr val="000000">
                 <a:alpha val="15000"/>
               </a:srgbClr>
@@ -11842,7 +11660,7 @@
           <a:bodyPr wrap="square" lIns="0" tIns="0" rIns="0" bIns="0" rtlCol="0" anchor="ctr"/>
           <a:lstStyle/>
           <a:p>
-            <a:pPr algn="ctr" indent="0" marL="0">
+            <a:pPr marL="0" indent="0" algn="ctr">
               <a:buNone/>
             </a:pPr>
             <a:r>
@@ -11881,7 +11699,7 @@
           <a:bodyPr wrap="square" lIns="0" tIns="0" rIns="0" bIns="0" rtlCol="0" anchor="ctr"/>
           <a:lstStyle/>
           <a:p>
-            <a:pPr indent="0" marL="0">
+            <a:pPr marL="0" indent="0">
               <a:buNone/>
             </a:pPr>
             <a:r>
@@ -11920,7 +11738,7 @@
           <a:bodyPr wrap="square" rtlCol="0" anchor="ctr"/>
           <a:lstStyle/>
           <a:p>
-            <a:pPr indent="0" marL="0">
+            <a:pPr marL="0" indent="0">
               <a:buNone/>
             </a:pPr>
             <a:r>
@@ -11957,7 +11775,7 @@
           </a:solidFill>
           <a:ln/>
           <a:effectLst>
-            <a:outerShdw sx="100000" sy="100000" kx="0" ky="0" algn="bl" rotWithShape="0" blurRad="101600" dist="38100" dir="8100000">
+            <a:outerShdw blurRad="101600" dist="38100" dir="8100000" algn="bl" rotWithShape="0">
               <a:srgbClr val="000000">
                 <a:alpha val="15000"/>
               </a:srgbClr>
@@ -12026,7 +11844,7 @@
           <a:bodyPr wrap="square" lIns="0" tIns="0" rIns="0" bIns="0" rtlCol="0" anchor="ctr"/>
           <a:lstStyle/>
           <a:p>
-            <a:pPr algn="ctr" indent="0" marL="0">
+            <a:pPr marL="0" indent="0" algn="ctr">
               <a:buNone/>
             </a:pPr>
             <a:r>
@@ -12065,7 +11883,7 @@
           <a:bodyPr wrap="square" lIns="0" tIns="0" rIns="0" bIns="0" rtlCol="0" anchor="ctr"/>
           <a:lstStyle/>
           <a:p>
-            <a:pPr indent="0" marL="0">
+            <a:pPr marL="0" indent="0">
               <a:buNone/>
             </a:pPr>
             <a:r>
@@ -12104,7 +11922,7 @@
           <a:bodyPr wrap="square" rtlCol="0" anchor="ctr"/>
           <a:lstStyle/>
           <a:p>
-            <a:pPr indent="0" marL="0">
+            <a:pPr marL="0" indent="0">
               <a:buNone/>
             </a:pPr>
             <a:r>
@@ -12423,4 +12241,319 @@
     </a:ext>
   </a:extLst>
 </a:theme>
+</file>
+
+<file path=ppt/theme/theme2.xml><?xml version="1.0" encoding="utf-8"?>
+<a:theme xmlns:a="http://schemas.openxmlformats.org/drawingml/2006/main" name="Tema de Office">
+  <a:themeElements>
+    <a:clrScheme name="Office">
+      <a:dk1>
+        <a:sysClr val="windowText" lastClr="000000"/>
+      </a:dk1>
+      <a:lt1>
+        <a:sysClr val="window" lastClr="FFFFFF"/>
+      </a:lt1>
+      <a:dk2>
+        <a:srgbClr val="0E2841"/>
+      </a:dk2>
+      <a:lt2>
+        <a:srgbClr val="E8E8E8"/>
+      </a:lt2>
+      <a:accent1>
+        <a:srgbClr val="156082"/>
+      </a:accent1>
+      <a:accent2>
+        <a:srgbClr val="E97132"/>
+      </a:accent2>
+      <a:accent3>
+        <a:srgbClr val="196B24"/>
+      </a:accent3>
+      <a:accent4>
+        <a:srgbClr val="0F9ED5"/>
+      </a:accent4>
+      <a:accent5>
+        <a:srgbClr val="A02B93"/>
+      </a:accent5>
+      <a:accent6>
+        <a:srgbClr val="4EA72E"/>
+      </a:accent6>
+      <a:hlink>
+        <a:srgbClr val="467886"/>
+      </a:hlink>
+      <a:folHlink>
+        <a:srgbClr val="96607D"/>
+      </a:folHlink>
+    </a:clrScheme>
+    <a:fontScheme name="Office">
+      <a:majorFont>
+        <a:latin typeface="Aptos Display" panose="02110004020202020204"/>
+        <a:ea typeface=""/>
+        <a:cs typeface=""/>
+        <a:font script="Jpan" typeface="游ゴシック Light"/>
+        <a:font script="Hang" typeface="맑은 고딕"/>
+        <a:font script="Hans" typeface="等线 Light"/>
+        <a:font script="Hant" typeface="新細明體"/>
+        <a:font script="Arab" typeface="Times New Roman"/>
+        <a:font script="Hebr" typeface="Times New Roman"/>
+        <a:font script="Thai" typeface="Angsana New"/>
+        <a:font script="Ethi" typeface="Nyala"/>
+        <a:font script="Beng" typeface="Vrinda"/>
+        <a:font script="Gujr" typeface="Shruti"/>
+        <a:font script="Khmr" typeface="MoolBoran"/>
+        <a:font script="Knda" typeface="Tunga"/>
+        <a:font script="Guru" typeface="Raavi"/>
+        <a:font script="Cans" typeface="Euphemia"/>
+        <a:font script="Cher" typeface="Plantagenet Cherokee"/>
+        <a:font script="Yiii" typeface="Microsoft Yi Baiti"/>
+        <a:font script="Tibt" typeface="Microsoft Himalaya"/>
+        <a:font script="Thaa" typeface="MV Boli"/>
+        <a:font script="Deva" typeface="Mangal"/>
+        <a:font script="Telu" typeface="Gautami"/>
+        <a:font script="Taml" typeface="Latha"/>
+        <a:font script="Syrc" typeface="Estrangelo Edessa"/>
+        <a:font script="Orya" typeface="Kalinga"/>
+        <a:font script="Mlym" typeface="Kartika"/>
+        <a:font script="Laoo" typeface="DokChampa"/>
+        <a:font script="Sinh" typeface="Iskoola Pota"/>
+        <a:font script="Mong" typeface="Mongolian Baiti"/>
+        <a:font script="Viet" typeface="Times New Roman"/>
+        <a:font script="Uigh" typeface="Microsoft Uighur"/>
+        <a:font script="Geor" typeface="Sylfaen"/>
+        <a:font script="Armn" typeface="Arial"/>
+        <a:font script="Bugi" typeface="Leelawadee UI"/>
+        <a:font script="Bopo" typeface="Microsoft JhengHei"/>
+        <a:font script="Java" typeface="Javanese Text"/>
+        <a:font script="Lisu" typeface="Segoe UI"/>
+        <a:font script="Mymr" typeface="Myanmar Text"/>
+        <a:font script="Nkoo" typeface="Ebrima"/>
+        <a:font script="Olck" typeface="Nirmala UI"/>
+        <a:font script="Osma" typeface="Ebrima"/>
+        <a:font script="Phag" typeface="Phagspa"/>
+        <a:font script="Syrn" typeface="Estrangelo Edessa"/>
+        <a:font script="Syrj" typeface="Estrangelo Edessa"/>
+        <a:font script="Syre" typeface="Estrangelo Edessa"/>
+        <a:font script="Sora" typeface="Nirmala UI"/>
+        <a:font script="Tale" typeface="Microsoft Tai Le"/>
+        <a:font script="Talu" typeface="Microsoft New Tai Lue"/>
+        <a:font script="Tfng" typeface="Ebrima"/>
+      </a:majorFont>
+      <a:minorFont>
+        <a:latin typeface="Aptos" panose="02110004020202020204"/>
+        <a:ea typeface=""/>
+        <a:cs typeface=""/>
+        <a:font script="Jpan" typeface="游ゴシック"/>
+        <a:font script="Hang" typeface="맑은 고딕"/>
+        <a:font script="Hans" typeface="等线"/>
+        <a:font script="Hant" typeface="新細明體"/>
+        <a:font script="Arab" typeface="Arial"/>
+        <a:font script="Hebr" typeface="Arial"/>
+        <a:font script="Thai" typeface="Cordia New"/>
+        <a:font script="Ethi" typeface="Nyala"/>
+        <a:font script="Beng" typeface="Vrinda"/>
+        <a:font script="Gujr" typeface="Shruti"/>
+        <a:font script="Khmr" typeface="DaunPenh"/>
+        <a:font script="Knda" typeface="Tunga"/>
+        <a:font script="Guru" typeface="Raavi"/>
+        <a:font script="Cans" typeface="Euphemia"/>
+        <a:font script="Cher" typeface="Plantagenet Cherokee"/>
+        <a:font script="Yiii" typeface="Microsoft Yi Baiti"/>
+        <a:font script="Tibt" typeface="Microsoft Himalaya"/>
+        <a:font script="Thaa" typeface="MV Boli"/>
+        <a:font script="Deva" typeface="Mangal"/>
+        <a:font script="Telu" typeface="Gautami"/>
+        <a:font script="Taml" typeface="Latha"/>
+        <a:font script="Syrc" typeface="Estrangelo Edessa"/>
+        <a:font script="Orya" typeface="Kalinga"/>
+        <a:font script="Mlym" typeface="Kartika"/>
+        <a:font script="Laoo" typeface="DokChampa"/>
+        <a:font script="Sinh" typeface="Iskoola Pota"/>
+        <a:font script="Mong" typeface="Mongolian Baiti"/>
+        <a:font script="Viet" typeface="Arial"/>
+        <a:font script="Uigh" typeface="Microsoft Uighur"/>
+        <a:font script="Geor" typeface="Sylfaen"/>
+        <a:font script="Armn" typeface="Arial"/>
+        <a:font script="Bugi" typeface="Leelawadee UI"/>
+        <a:font script="Bopo" typeface="Microsoft JhengHei"/>
+        <a:font script="Java" typeface="Javanese Text"/>
+        <a:font script="Lisu" typeface="Segoe UI"/>
+        <a:font script="Mymr" typeface="Myanmar Text"/>
+        <a:font script="Nkoo" typeface="Ebrima"/>
+        <a:font script="Olck" typeface="Nirmala UI"/>
+        <a:font script="Osma" typeface="Ebrima"/>
+        <a:font script="Phag" typeface="Phagspa"/>
+        <a:font script="Syrn" typeface="Estrangelo Edessa"/>
+        <a:font script="Syrj" typeface="Estrangelo Edessa"/>
+        <a:font script="Syre" typeface="Estrangelo Edessa"/>
+        <a:font script="Sora" typeface="Nirmala UI"/>
+        <a:font script="Tale" typeface="Microsoft Tai Le"/>
+        <a:font script="Talu" typeface="Microsoft New Tai Lue"/>
+        <a:font script="Tfng" typeface="Ebrima"/>
+      </a:minorFont>
+    </a:fontScheme>
+    <a:fmtScheme name="Office">
+      <a:fillStyleLst>
+        <a:solidFill>
+          <a:schemeClr val="phClr"/>
+        </a:solidFill>
+        <a:gradFill rotWithShape="1">
+          <a:gsLst>
+            <a:gs pos="0">
+              <a:schemeClr val="phClr">
+                <a:lumMod val="110000"/>
+                <a:satMod val="105000"/>
+                <a:tint val="67000"/>
+              </a:schemeClr>
+            </a:gs>
+            <a:gs pos="50000">
+              <a:schemeClr val="phClr">
+                <a:lumMod val="105000"/>
+                <a:satMod val="103000"/>
+                <a:tint val="73000"/>
+              </a:schemeClr>
+            </a:gs>
+            <a:gs pos="100000">
+              <a:schemeClr val="phClr">
+                <a:lumMod val="105000"/>
+                <a:satMod val="109000"/>
+                <a:tint val="81000"/>
+              </a:schemeClr>
+            </a:gs>
+          </a:gsLst>
+          <a:lin ang="5400000" scaled="0"/>
+        </a:gradFill>
+        <a:gradFill rotWithShape="1">
+          <a:gsLst>
+            <a:gs pos="0">
+              <a:schemeClr val="phClr">
+                <a:satMod val="103000"/>
+                <a:lumMod val="102000"/>
+                <a:tint val="94000"/>
+              </a:schemeClr>
+            </a:gs>
+            <a:gs pos="50000">
+              <a:schemeClr val="phClr">
+                <a:satMod val="110000"/>
+                <a:lumMod val="100000"/>
+                <a:shade val="100000"/>
+              </a:schemeClr>
+            </a:gs>
+            <a:gs pos="100000">
+              <a:schemeClr val="phClr">
+                <a:lumMod val="99000"/>
+                <a:satMod val="120000"/>
+                <a:shade val="78000"/>
+              </a:schemeClr>
+            </a:gs>
+          </a:gsLst>
+          <a:lin ang="5400000" scaled="0"/>
+        </a:gradFill>
+      </a:fillStyleLst>
+      <a:lnStyleLst>
+        <a:ln w="12700" cap="flat" cmpd="sng" algn="ctr">
+          <a:solidFill>
+            <a:schemeClr val="phClr"/>
+          </a:solidFill>
+          <a:prstDash val="solid"/>
+          <a:miter lim="800000"/>
+        </a:ln>
+        <a:ln w="19050" cap="flat" cmpd="sng" algn="ctr">
+          <a:solidFill>
+            <a:schemeClr val="phClr"/>
+          </a:solidFill>
+          <a:prstDash val="solid"/>
+          <a:miter lim="800000"/>
+        </a:ln>
+        <a:ln w="25400" cap="flat" cmpd="sng" algn="ctr">
+          <a:solidFill>
+            <a:schemeClr val="phClr"/>
+          </a:solidFill>
+          <a:prstDash val="solid"/>
+          <a:miter lim="800000"/>
+        </a:ln>
+      </a:lnStyleLst>
+      <a:effectStyleLst>
+        <a:effectStyle>
+          <a:effectLst/>
+        </a:effectStyle>
+        <a:effectStyle>
+          <a:effectLst/>
+        </a:effectStyle>
+        <a:effectStyle>
+          <a:effectLst>
+            <a:outerShdw blurRad="57150" dist="19050" dir="5400000" algn="ctr" rotWithShape="0">
+              <a:srgbClr val="000000">
+                <a:alpha val="63000"/>
+              </a:srgbClr>
+            </a:outerShdw>
+          </a:effectLst>
+        </a:effectStyle>
+      </a:effectStyleLst>
+      <a:bgFillStyleLst>
+        <a:solidFill>
+          <a:schemeClr val="phClr"/>
+        </a:solidFill>
+        <a:solidFill>
+          <a:schemeClr val="phClr">
+            <a:tint val="95000"/>
+            <a:satMod val="170000"/>
+          </a:schemeClr>
+        </a:solidFill>
+        <a:gradFill rotWithShape="1">
+          <a:gsLst>
+            <a:gs pos="0">
+              <a:schemeClr val="phClr">
+                <a:tint val="93000"/>
+                <a:satMod val="150000"/>
+                <a:shade val="98000"/>
+                <a:lumMod val="102000"/>
+              </a:schemeClr>
+            </a:gs>
+            <a:gs pos="50000">
+              <a:schemeClr val="phClr">
+                <a:tint val="98000"/>
+                <a:satMod val="130000"/>
+                <a:shade val="90000"/>
+                <a:lumMod val="103000"/>
+              </a:schemeClr>
+            </a:gs>
+            <a:gs pos="100000">
+              <a:schemeClr val="phClr">
+                <a:shade val="63000"/>
+                <a:satMod val="120000"/>
+              </a:schemeClr>
+            </a:gs>
+          </a:gsLst>
+          <a:lin ang="5400000" scaled="0"/>
+        </a:gradFill>
+      </a:bgFillStyleLst>
+    </a:fmtScheme>
+  </a:themeElements>
+  <a:objectDefaults>
+    <a:lnDef>
+      <a:spPr/>
+      <a:bodyPr/>
+      <a:lstStyle/>
+      <a:style>
+        <a:lnRef idx="2">
+          <a:schemeClr val="accent1"/>
+        </a:lnRef>
+        <a:fillRef idx="0">
+          <a:schemeClr val="accent1"/>
+        </a:fillRef>
+        <a:effectRef idx="1">
+          <a:schemeClr val="accent1"/>
+        </a:effectRef>
+        <a:fontRef idx="minor">
+          <a:schemeClr val="tx1"/>
+        </a:fontRef>
+      </a:style>
+    </a:lnDef>
+  </a:objectDefaults>
+  <a:extraClrSchemeLst/>
+  <a:extLst>
+    <a:ext uri="{05A4C25C-085E-4340-85A3-A5531E510DB2}">
+      <thm15:themeFamily xmlns:thm15="http://schemas.microsoft.com/office/thememl/2012/main" name="Office Theme" id="{2E142A2C-CD16-42D6-873A-C26D2A0506FA}" vid="{1BDDFF52-6CD6-40A5-AB3C-68EB2F1E4D0A}"/>
+    </a:ext>
+  </a:extLst>
+</a:theme>
 </file>